--- a/260418_add/supplefigure_260420/SuppFig_S20_convergence_null.pptx
+++ b/260418_add/supplefigure_260420/SuppFig_S20_convergence_null.pptx
@@ -3156,83 +3156,99 @@
                 </a:solidFill>
                 <a:latin typeface="Arial"/>
               </a:rPr>
-              <a:t>Pre-specified 36-pair baseline × cascade-Δ convergence test — null</a:t>
-            </a:r>
-          </a:p>
-        </p:txBody>
-      </p:sp>
-      <p:cxnSp>
-        <p:nvCxnSpPr>
-          <p:cNvPr id="4" name="Connector 3"/>
-          <p:cNvCxnSpPr/>
-          <p:nvPr/>
-        </p:nvCxnSpPr>
-        <p:spPr>
-          <a:xfrm>
-            <a:off x="3200400" y="6400800"/>
-            <a:ext cx="7772400" cy="0"/>
-          </a:xfrm>
-          <a:prstGeom prst="line">
-            <a:avLst/>
-          </a:prstGeom>
-          <a:ln w="12700">
-            <a:solidFill>
-              <a:srgbClr val="222222"/>
-            </a:solidFill>
+              <a:t>36-pair baseline × cascade-Δ convergence test — null (BH-q 0.10 gold reference)</a:t>
+            </a:r>
+          </a:p>
+        </p:txBody>
+      </p:sp>
+      <p:sp>
+        <p:nvSpPr>
+          <p:cNvPr id="4" name="Rectangle 3"/>
+          <p:cNvSpPr/>
+          <p:nvPr/>
+        </p:nvSpPr>
+        <p:spPr>
+          <a:xfrm>
+            <a:off x="9340596" y="1097280"/>
+            <a:ext cx="1632204" cy="5303520"/>
+          </a:xfrm>
+          <a:prstGeom prst="rect">
+            <a:avLst/>
+          </a:prstGeom>
+          <a:solidFill>
+            <a:srgbClr val="F0F0F0"/>
+          </a:solidFill>
+          <a:ln>
+            <a:noFill/>
           </a:ln>
           <a:effectLst/>
         </p:spPr>
         <p:style>
-          <a:lnRef idx="2">
+          <a:lnRef idx="1">
             <a:schemeClr val="accent1"/>
           </a:lnRef>
-          <a:fillRef idx="0">
+          <a:fillRef idx="3">
             <a:schemeClr val="accent1"/>
           </a:fillRef>
-          <a:effectRef idx="1">
+          <a:effectRef idx="2">
             <a:schemeClr val="accent1"/>
           </a:effectRef>
           <a:fontRef idx="minor">
-            <a:schemeClr val="tx1"/>
+            <a:schemeClr val="lt1"/>
           </a:fontRef>
         </p:style>
-      </p:cxnSp>
-      <p:cxnSp>
-        <p:nvCxnSpPr>
-          <p:cNvPr id="5" name="Connector 4"/>
-          <p:cNvCxnSpPr/>
-          <p:nvPr/>
-        </p:nvCxnSpPr>
+        <p:txBody>
+          <a:bodyPr rtlCol="0" anchor="ctr"/>
+          <a:lstStyle/>
+          <a:p>
+            <a:pPr algn="ctr"/>
+          </a:p>
+        </p:txBody>
+      </p:sp>
+      <p:sp>
+        <p:nvSpPr>
+          <p:cNvPr id="5" name="Rectangle 4"/>
+          <p:cNvSpPr/>
+          <p:nvPr/>
+        </p:nvSpPr>
         <p:spPr>
           <a:xfrm>
             <a:off x="3200400" y="1097280"/>
-            <a:ext cx="0" cy="5303520"/>
-          </a:xfrm>
-          <a:prstGeom prst="line">
-            <a:avLst/>
-          </a:prstGeom>
-          <a:ln w="12700">
-            <a:solidFill>
-              <a:srgbClr val="222222"/>
-            </a:solidFill>
+            <a:ext cx="1632204" cy="5303520"/>
+          </a:xfrm>
+          <a:prstGeom prst="rect">
+            <a:avLst/>
+          </a:prstGeom>
+          <a:solidFill>
+            <a:srgbClr val="F0F0F0"/>
+          </a:solidFill>
+          <a:ln>
+            <a:noFill/>
           </a:ln>
           <a:effectLst/>
         </p:spPr>
         <p:style>
-          <a:lnRef idx="2">
+          <a:lnRef idx="1">
             <a:schemeClr val="accent1"/>
           </a:lnRef>
-          <a:fillRef idx="0">
+          <a:fillRef idx="3">
             <a:schemeClr val="accent1"/>
           </a:fillRef>
-          <a:effectRef idx="1">
+          <a:effectRef idx="2">
             <a:schemeClr val="accent1"/>
           </a:effectRef>
           <a:fontRef idx="minor">
-            <a:schemeClr val="tx1"/>
+            <a:schemeClr val="lt1"/>
           </a:fontRef>
         </p:style>
-      </p:cxnSp>
+        <p:txBody>
+          <a:bodyPr rtlCol="0" anchor="ctr"/>
+          <a:lstStyle/>
+          <a:p>
+            <a:pPr algn="ctr"/>
+          </a:p>
+        </p:txBody>
+      </p:sp>
       <p:cxnSp>
         <p:nvCxnSpPr>
           <p:cNvPr id="6" name="Connector 5"/>
@@ -3241,15 +3257,15 @@
         </p:nvCxnSpPr>
         <p:spPr>
           <a:xfrm>
-            <a:off x="10972800" y="1097280"/>
-            <a:ext cx="0" cy="5303520"/>
+            <a:off x="3200400" y="6400800"/>
+            <a:ext cx="7772400" cy="0"/>
           </a:xfrm>
           <a:prstGeom prst="line">
             <a:avLst/>
           </a:prstGeom>
-          <a:ln w="6350">
+          <a:ln w="12700">
             <a:solidFill>
-              <a:srgbClr val="DDDDDD"/>
+              <a:srgbClr val="222222"/>
             </a:solidFill>
           </a:ln>
           <a:effectLst/>
@@ -3278,14 +3294,14 @@
         <p:spPr>
           <a:xfrm>
             <a:off x="3200400" y="1097280"/>
-            <a:ext cx="7772400" cy="0"/>
+            <a:ext cx="0" cy="5303520"/>
           </a:xfrm>
           <a:prstGeom prst="line">
             <a:avLst/>
           </a:prstGeom>
-          <a:ln w="6350">
+          <a:ln w="12700">
             <a:solidFill>
-              <a:srgbClr val="DDDDDD"/>
+              <a:srgbClr val="222222"/>
             </a:solidFill>
           </a:ln>
           <a:effectLst/>
@@ -3313,411 +3329,15 @@
         </p:nvCxnSpPr>
         <p:spPr>
           <a:xfrm>
-            <a:off x="3200400" y="6400800"/>
-            <a:ext cx="0" cy="64008"/>
+            <a:off x="10972800" y="1097280"/>
+            <a:ext cx="0" cy="5303520"/>
           </a:xfrm>
           <a:prstGeom prst="line">
             <a:avLst/>
           </a:prstGeom>
-          <a:ln w="9525">
+          <a:ln w="6350">
             <a:solidFill>
-              <a:srgbClr val="222222"/>
-            </a:solidFill>
-          </a:ln>
-          <a:effectLst/>
-        </p:spPr>
-        <p:style>
-          <a:lnRef idx="2">
-            <a:schemeClr val="accent1"/>
-          </a:lnRef>
-          <a:fillRef idx="0">
-            <a:schemeClr val="accent1"/>
-          </a:fillRef>
-          <a:effectRef idx="1">
-            <a:schemeClr val="accent1"/>
-          </a:effectRef>
-          <a:fontRef idx="minor">
-            <a:schemeClr val="tx1"/>
-          </a:fontRef>
-        </p:style>
-      </p:cxnSp>
-      <p:sp>
-        <p:nvSpPr>
-          <p:cNvPr id="9" name="TextBox 8"/>
-          <p:cNvSpPr txBox="1"/>
-          <p:nvPr/>
-        </p:nvSpPr>
-        <p:spPr>
-          <a:xfrm>
-            <a:off x="2834640" y="6455664"/>
-            <a:ext cx="731520" cy="164592"/>
-          </a:xfrm>
-          <a:prstGeom prst="rect">
-            <a:avLst/>
-          </a:prstGeom>
-          <a:noFill/>
-          <a:effectLst/>
-        </p:spPr>
-        <p:txBody>
-          <a:bodyPr wrap="square" lIns="0" rIns="0" tIns="0" bIns="0" anchor="t">
-            <a:spAutoFit/>
-          </a:bodyPr>
-          <a:lstStyle/>
-          <a:p>
-            <a:pPr algn="ctr"/>
-            <a:r>
-              <a:rPr sz="800" b="0" i="0">
-                <a:solidFill>
-                  <a:srgbClr val="222222"/>
-                </a:solidFill>
-                <a:latin typeface="Arial"/>
-              </a:rPr>
-              <a:t>-1</a:t>
-            </a:r>
-          </a:p>
-        </p:txBody>
-      </p:sp>
-      <p:cxnSp>
-        <p:nvCxnSpPr>
-          <p:cNvPr id="10" name="Connector 9"/>
-          <p:cNvCxnSpPr/>
-          <p:nvPr/>
-        </p:nvCxnSpPr>
-        <p:spPr>
-          <a:xfrm>
-            <a:off x="5143500" y="6400800"/>
-            <a:ext cx="0" cy="64008"/>
-          </a:xfrm>
-          <a:prstGeom prst="line">
-            <a:avLst/>
-          </a:prstGeom>
-          <a:ln w="9525">
-            <a:solidFill>
-              <a:srgbClr val="222222"/>
-            </a:solidFill>
-          </a:ln>
-          <a:effectLst/>
-        </p:spPr>
-        <p:style>
-          <a:lnRef idx="2">
-            <a:schemeClr val="accent1"/>
-          </a:lnRef>
-          <a:fillRef idx="0">
-            <a:schemeClr val="accent1"/>
-          </a:fillRef>
-          <a:effectRef idx="1">
-            <a:schemeClr val="accent1"/>
-          </a:effectRef>
-          <a:fontRef idx="minor">
-            <a:schemeClr val="tx1"/>
-          </a:fontRef>
-        </p:style>
-      </p:cxnSp>
-      <p:sp>
-        <p:nvSpPr>
-          <p:cNvPr id="11" name="TextBox 10"/>
-          <p:cNvSpPr txBox="1"/>
-          <p:nvPr/>
-        </p:nvSpPr>
-        <p:spPr>
-          <a:xfrm>
-            <a:off x="4777740" y="6455664"/>
-            <a:ext cx="731520" cy="164592"/>
-          </a:xfrm>
-          <a:prstGeom prst="rect">
-            <a:avLst/>
-          </a:prstGeom>
-          <a:noFill/>
-          <a:effectLst/>
-        </p:spPr>
-        <p:txBody>
-          <a:bodyPr wrap="square" lIns="0" rIns="0" tIns="0" bIns="0" anchor="t">
-            <a:spAutoFit/>
-          </a:bodyPr>
-          <a:lstStyle/>
-          <a:p>
-            <a:pPr algn="ctr"/>
-            <a:r>
-              <a:rPr sz="800" b="0" i="0">
-                <a:solidFill>
-                  <a:srgbClr val="222222"/>
-                </a:solidFill>
-                <a:latin typeface="Arial"/>
-              </a:rPr>
-              <a:t>-0.5</a:t>
-            </a:r>
-          </a:p>
-        </p:txBody>
-      </p:sp>
-      <p:cxnSp>
-        <p:nvCxnSpPr>
-          <p:cNvPr id="12" name="Connector 11"/>
-          <p:cNvCxnSpPr/>
-          <p:nvPr/>
-        </p:nvCxnSpPr>
-        <p:spPr>
-          <a:xfrm>
-            <a:off x="7086600" y="6400800"/>
-            <a:ext cx="0" cy="64008"/>
-          </a:xfrm>
-          <a:prstGeom prst="line">
-            <a:avLst/>
-          </a:prstGeom>
-          <a:ln w="9525">
-            <a:solidFill>
-              <a:srgbClr val="222222"/>
-            </a:solidFill>
-          </a:ln>
-          <a:effectLst/>
-        </p:spPr>
-        <p:style>
-          <a:lnRef idx="2">
-            <a:schemeClr val="accent1"/>
-          </a:lnRef>
-          <a:fillRef idx="0">
-            <a:schemeClr val="accent1"/>
-          </a:fillRef>
-          <a:effectRef idx="1">
-            <a:schemeClr val="accent1"/>
-          </a:effectRef>
-          <a:fontRef idx="minor">
-            <a:schemeClr val="tx1"/>
-          </a:fontRef>
-        </p:style>
-      </p:cxnSp>
-      <p:sp>
-        <p:nvSpPr>
-          <p:cNvPr id="13" name="TextBox 12"/>
-          <p:cNvSpPr txBox="1"/>
-          <p:nvPr/>
-        </p:nvSpPr>
-        <p:spPr>
-          <a:xfrm>
-            <a:off x="6720840" y="6455664"/>
-            <a:ext cx="731520" cy="164592"/>
-          </a:xfrm>
-          <a:prstGeom prst="rect">
-            <a:avLst/>
-          </a:prstGeom>
-          <a:noFill/>
-          <a:effectLst/>
-        </p:spPr>
-        <p:txBody>
-          <a:bodyPr wrap="square" lIns="0" rIns="0" tIns="0" bIns="0" anchor="t">
-            <a:spAutoFit/>
-          </a:bodyPr>
-          <a:lstStyle/>
-          <a:p>
-            <a:pPr algn="ctr"/>
-            <a:r>
-              <a:rPr sz="800" b="0" i="0">
-                <a:solidFill>
-                  <a:srgbClr val="222222"/>
-                </a:solidFill>
-                <a:latin typeface="Arial"/>
-              </a:rPr>
-              <a:t>+0</a:t>
-            </a:r>
-          </a:p>
-        </p:txBody>
-      </p:sp>
-      <p:cxnSp>
-        <p:nvCxnSpPr>
-          <p:cNvPr id="14" name="Connector 13"/>
-          <p:cNvCxnSpPr/>
-          <p:nvPr/>
-        </p:nvCxnSpPr>
-        <p:spPr>
-          <a:xfrm>
-            <a:off x="9029700" y="6400800"/>
-            <a:ext cx="0" cy="64008"/>
-          </a:xfrm>
-          <a:prstGeom prst="line">
-            <a:avLst/>
-          </a:prstGeom>
-          <a:ln w="9525">
-            <a:solidFill>
-              <a:srgbClr val="222222"/>
-            </a:solidFill>
-          </a:ln>
-          <a:effectLst/>
-        </p:spPr>
-        <p:style>
-          <a:lnRef idx="2">
-            <a:schemeClr val="accent1"/>
-          </a:lnRef>
-          <a:fillRef idx="0">
-            <a:schemeClr val="accent1"/>
-          </a:fillRef>
-          <a:effectRef idx="1">
-            <a:schemeClr val="accent1"/>
-          </a:effectRef>
-          <a:fontRef idx="minor">
-            <a:schemeClr val="tx1"/>
-          </a:fontRef>
-        </p:style>
-      </p:cxnSp>
-      <p:sp>
-        <p:nvSpPr>
-          <p:cNvPr id="15" name="TextBox 14"/>
-          <p:cNvSpPr txBox="1"/>
-          <p:nvPr/>
-        </p:nvSpPr>
-        <p:spPr>
-          <a:xfrm>
-            <a:off x="8663940" y="6455664"/>
-            <a:ext cx="731520" cy="164592"/>
-          </a:xfrm>
-          <a:prstGeom prst="rect">
-            <a:avLst/>
-          </a:prstGeom>
-          <a:noFill/>
-          <a:effectLst/>
-        </p:spPr>
-        <p:txBody>
-          <a:bodyPr wrap="square" lIns="0" rIns="0" tIns="0" bIns="0" anchor="t">
-            <a:spAutoFit/>
-          </a:bodyPr>
-          <a:lstStyle/>
-          <a:p>
-            <a:pPr algn="ctr"/>
-            <a:r>
-              <a:rPr sz="800" b="0" i="0">
-                <a:solidFill>
-                  <a:srgbClr val="222222"/>
-                </a:solidFill>
-                <a:latin typeface="Arial"/>
-              </a:rPr>
-              <a:t>+0.5</a:t>
-            </a:r>
-          </a:p>
-        </p:txBody>
-      </p:sp>
-      <p:cxnSp>
-        <p:nvCxnSpPr>
-          <p:cNvPr id="16" name="Connector 15"/>
-          <p:cNvCxnSpPr/>
-          <p:nvPr/>
-        </p:nvCxnSpPr>
-        <p:spPr>
-          <a:xfrm>
-            <a:off x="10972800" y="6400800"/>
-            <a:ext cx="0" cy="64008"/>
-          </a:xfrm>
-          <a:prstGeom prst="line">
-            <a:avLst/>
-          </a:prstGeom>
-          <a:ln w="9525">
-            <a:solidFill>
-              <a:srgbClr val="222222"/>
-            </a:solidFill>
-          </a:ln>
-          <a:effectLst/>
-        </p:spPr>
-        <p:style>
-          <a:lnRef idx="2">
-            <a:schemeClr val="accent1"/>
-          </a:lnRef>
-          <a:fillRef idx="0">
-            <a:schemeClr val="accent1"/>
-          </a:fillRef>
-          <a:effectRef idx="1">
-            <a:schemeClr val="accent1"/>
-          </a:effectRef>
-          <a:fontRef idx="minor">
-            <a:schemeClr val="tx1"/>
-          </a:fontRef>
-        </p:style>
-      </p:cxnSp>
-      <p:sp>
-        <p:nvSpPr>
-          <p:cNvPr id="17" name="TextBox 16"/>
-          <p:cNvSpPr txBox="1"/>
-          <p:nvPr/>
-        </p:nvSpPr>
-        <p:spPr>
-          <a:xfrm>
-            <a:off x="10607040" y="6455664"/>
-            <a:ext cx="731520" cy="164592"/>
-          </a:xfrm>
-          <a:prstGeom prst="rect">
-            <a:avLst/>
-          </a:prstGeom>
-          <a:noFill/>
-          <a:effectLst/>
-        </p:spPr>
-        <p:txBody>
-          <a:bodyPr wrap="square" lIns="0" rIns="0" tIns="0" bIns="0" anchor="t">
-            <a:spAutoFit/>
-          </a:bodyPr>
-          <a:lstStyle/>
-          <a:p>
-            <a:pPr algn="ctr"/>
-            <a:r>
-              <a:rPr sz="800" b="0" i="0">
-                <a:solidFill>
-                  <a:srgbClr val="222222"/>
-                </a:solidFill>
-                <a:latin typeface="Arial"/>
-              </a:rPr>
-              <a:t>+1</a:t>
-            </a:r>
-          </a:p>
-        </p:txBody>
-      </p:sp>
-      <p:sp>
-        <p:nvSpPr>
-          <p:cNvPr id="18" name="TextBox 17"/>
-          <p:cNvSpPr txBox="1"/>
-          <p:nvPr/>
-        </p:nvSpPr>
-        <p:spPr>
-          <a:xfrm>
-            <a:off x="3200400" y="6748272"/>
-            <a:ext cx="7772400" cy="228600"/>
-          </a:xfrm>
-          <a:prstGeom prst="rect">
-            <a:avLst/>
-          </a:prstGeom>
-          <a:noFill/>
-          <a:effectLst/>
-        </p:spPr>
-        <p:txBody>
-          <a:bodyPr wrap="square" lIns="0" rIns="0" tIns="0" bIns="0" anchor="t">
-            <a:spAutoFit/>
-          </a:bodyPr>
-          <a:lstStyle/>
-          <a:p>
-            <a:pPr algn="ctr"/>
-            <a:r>
-              <a:rPr sz="900" b="1" i="0">
-                <a:solidFill>
-                  <a:srgbClr val="222222"/>
-                </a:solidFill>
-                <a:latin typeface="Arial"/>
-              </a:rPr>
-              <a:t>Spearman r  (baseline × cascade-Δ, n = 12)</a:t>
-            </a:r>
-          </a:p>
-        </p:txBody>
-      </p:sp>
-      <p:cxnSp>
-        <p:nvCxnSpPr>
-          <p:cNvPr id="19" name="Connector 18"/>
-          <p:cNvCxnSpPr/>
-          <p:nvPr/>
-        </p:nvCxnSpPr>
-        <p:spPr>
-          <a:xfrm>
-            <a:off x="7086600" y="1097280"/>
-            <a:ext cx="0" cy="5303520"/>
-          </a:xfrm>
-          <a:prstGeom prst="line">
-            <a:avLst/>
-          </a:prstGeom>
-          <a:ln w="15240">
-            <a:solidFill>
-              <a:srgbClr val="222222"/>
+              <a:srgbClr val="DDDDDD"/>
             </a:solidFill>
           </a:ln>
           <a:effectLst/>
@@ -3739,23 +3359,22 @@
       </p:cxnSp>
       <p:cxnSp>
         <p:nvCxnSpPr>
-          <p:cNvPr id="20" name="Connector 19"/>
+          <p:cNvPr id="9" name="Connector 8"/>
           <p:cNvCxnSpPr/>
           <p:nvPr/>
         </p:nvCxnSpPr>
         <p:spPr>
           <a:xfrm>
-            <a:off x="4832604" y="1097280"/>
-            <a:ext cx="0" cy="5303520"/>
+            <a:off x="3200400" y="1097280"/>
+            <a:ext cx="7772400" cy="0"/>
           </a:xfrm>
           <a:prstGeom prst="line">
             <a:avLst/>
           </a:prstGeom>
           <a:ln w="6350">
             <a:solidFill>
-              <a:srgbClr val="BBBBBB"/>
+              <a:srgbClr val="DDDDDD"/>
             </a:solidFill>
-            <a:prstDash val="dash"/>
           </a:ln>
           <a:effectLst/>
         </p:spPr>
@@ -3776,23 +3395,22 @@
       </p:cxnSp>
       <p:cxnSp>
         <p:nvCxnSpPr>
-          <p:cNvPr id="21" name="Connector 20"/>
+          <p:cNvPr id="10" name="Connector 9"/>
           <p:cNvCxnSpPr/>
           <p:nvPr/>
         </p:nvCxnSpPr>
         <p:spPr>
           <a:xfrm>
-            <a:off x="9340596" y="1097280"/>
-            <a:ext cx="0" cy="5303520"/>
+            <a:off x="3200400" y="6400800"/>
+            <a:ext cx="0" cy="64008"/>
           </a:xfrm>
           <a:prstGeom prst="line">
             <a:avLst/>
           </a:prstGeom>
-          <a:ln w="6350">
+          <a:ln w="9525">
             <a:solidFill>
-              <a:srgbClr val="BBBBBB"/>
+              <a:srgbClr val="222222"/>
             </a:solidFill>
-            <a:prstDash val="dash"/>
           </a:ln>
           <a:effectLst/>
         </p:spPr>
@@ -3813,14 +3431,14 @@
       </p:cxnSp>
       <p:sp>
         <p:nvSpPr>
-          <p:cNvPr id="22" name="TextBox 21"/>
+          <p:cNvPr id="11" name="TextBox 10"/>
           <p:cNvSpPr txBox="1"/>
           <p:nvPr/>
         </p:nvSpPr>
         <p:spPr>
           <a:xfrm>
-            <a:off x="182880" y="1104646"/>
-            <a:ext cx="2926080" cy="132588"/>
+            <a:off x="2834640" y="6455664"/>
+            <a:ext cx="731520" cy="164592"/>
           </a:xfrm>
           <a:prstGeom prst="rect">
             <a:avLst/>
@@ -3829,41 +3447,41 @@
           <a:effectLst/>
         </p:spPr>
         <p:txBody>
-          <a:bodyPr wrap="square" lIns="0" rIns="0" tIns="0" bIns="0" anchor="ctr">
+          <a:bodyPr wrap="square" lIns="0" rIns="0" tIns="0" bIns="0" anchor="t">
             <a:spAutoFit/>
           </a:bodyPr>
           <a:lstStyle/>
           <a:p>
-            <a:pPr algn="r"/>
-            <a:r>
-              <a:rPr sz="600" b="0" i="0">
+            <a:pPr algn="ctr"/>
+            <a:r>
+              <a:rPr sz="800" b="0" i="0">
                 <a:solidFill>
                   <a:srgbClr val="222222"/>
                 </a:solidFill>
                 <a:latin typeface="Arial"/>
               </a:rPr>
-              <a:t>Myc Targets V × IGH_n_delta</a:t>
+              <a:t>-1</a:t>
             </a:r>
           </a:p>
         </p:txBody>
       </p:sp>
       <p:cxnSp>
         <p:nvCxnSpPr>
-          <p:cNvPr id="23" name="Connector 22"/>
+          <p:cNvPr id="12" name="Connector 11"/>
           <p:cNvCxnSpPr/>
           <p:nvPr/>
         </p:nvCxnSpPr>
         <p:spPr>
           <a:xfrm>
-            <a:off x="7086600" y="1170940"/>
-            <a:ext cx="2172386" cy="0"/>
+            <a:off x="5143500" y="6400800"/>
+            <a:ext cx="0" cy="64008"/>
           </a:xfrm>
           <a:prstGeom prst="line">
             <a:avLst/>
           </a:prstGeom>
-          <a:ln w="10160">
+          <a:ln w="9525">
             <a:solidFill>
-              <a:srgbClr val="BBBBBB"/>
+              <a:srgbClr val="222222"/>
             </a:solidFill>
           </a:ln>
           <a:effectLst/>
@@ -3885,7 +3503,477 @@
       </p:cxnSp>
       <p:sp>
         <p:nvSpPr>
-          <p:cNvPr id="24" name="Oval 23"/>
+          <p:cNvPr id="13" name="TextBox 12"/>
+          <p:cNvSpPr txBox="1"/>
+          <p:nvPr/>
+        </p:nvSpPr>
+        <p:spPr>
+          <a:xfrm>
+            <a:off x="4777740" y="6455664"/>
+            <a:ext cx="731520" cy="164592"/>
+          </a:xfrm>
+          <a:prstGeom prst="rect">
+            <a:avLst/>
+          </a:prstGeom>
+          <a:noFill/>
+          <a:effectLst/>
+        </p:spPr>
+        <p:txBody>
+          <a:bodyPr wrap="square" lIns="0" rIns="0" tIns="0" bIns="0" anchor="t">
+            <a:spAutoFit/>
+          </a:bodyPr>
+          <a:lstStyle/>
+          <a:p>
+            <a:pPr algn="ctr"/>
+            <a:r>
+              <a:rPr sz="800" b="0" i="0">
+                <a:solidFill>
+                  <a:srgbClr val="222222"/>
+                </a:solidFill>
+                <a:latin typeface="Arial"/>
+              </a:rPr>
+              <a:t>-0.5</a:t>
+            </a:r>
+          </a:p>
+        </p:txBody>
+      </p:sp>
+      <p:cxnSp>
+        <p:nvCxnSpPr>
+          <p:cNvPr id="14" name="Connector 13"/>
+          <p:cNvCxnSpPr/>
+          <p:nvPr/>
+        </p:nvCxnSpPr>
+        <p:spPr>
+          <a:xfrm>
+            <a:off x="7086600" y="6400800"/>
+            <a:ext cx="0" cy="64008"/>
+          </a:xfrm>
+          <a:prstGeom prst="line">
+            <a:avLst/>
+          </a:prstGeom>
+          <a:ln w="9525">
+            <a:solidFill>
+              <a:srgbClr val="222222"/>
+            </a:solidFill>
+          </a:ln>
+          <a:effectLst/>
+        </p:spPr>
+        <p:style>
+          <a:lnRef idx="2">
+            <a:schemeClr val="accent1"/>
+          </a:lnRef>
+          <a:fillRef idx="0">
+            <a:schemeClr val="accent1"/>
+          </a:fillRef>
+          <a:effectRef idx="1">
+            <a:schemeClr val="accent1"/>
+          </a:effectRef>
+          <a:fontRef idx="minor">
+            <a:schemeClr val="tx1"/>
+          </a:fontRef>
+        </p:style>
+      </p:cxnSp>
+      <p:sp>
+        <p:nvSpPr>
+          <p:cNvPr id="15" name="TextBox 14"/>
+          <p:cNvSpPr txBox="1"/>
+          <p:nvPr/>
+        </p:nvSpPr>
+        <p:spPr>
+          <a:xfrm>
+            <a:off x="6720840" y="6455664"/>
+            <a:ext cx="731520" cy="164592"/>
+          </a:xfrm>
+          <a:prstGeom prst="rect">
+            <a:avLst/>
+          </a:prstGeom>
+          <a:noFill/>
+          <a:effectLst/>
+        </p:spPr>
+        <p:txBody>
+          <a:bodyPr wrap="square" lIns="0" rIns="0" tIns="0" bIns="0" anchor="t">
+            <a:spAutoFit/>
+          </a:bodyPr>
+          <a:lstStyle/>
+          <a:p>
+            <a:pPr algn="ctr"/>
+            <a:r>
+              <a:rPr sz="800" b="0" i="0">
+                <a:solidFill>
+                  <a:srgbClr val="222222"/>
+                </a:solidFill>
+                <a:latin typeface="Arial"/>
+              </a:rPr>
+              <a:t>+0</a:t>
+            </a:r>
+          </a:p>
+        </p:txBody>
+      </p:sp>
+      <p:cxnSp>
+        <p:nvCxnSpPr>
+          <p:cNvPr id="16" name="Connector 15"/>
+          <p:cNvCxnSpPr/>
+          <p:nvPr/>
+        </p:nvCxnSpPr>
+        <p:spPr>
+          <a:xfrm>
+            <a:off x="9029700" y="6400800"/>
+            <a:ext cx="0" cy="64008"/>
+          </a:xfrm>
+          <a:prstGeom prst="line">
+            <a:avLst/>
+          </a:prstGeom>
+          <a:ln w="9525">
+            <a:solidFill>
+              <a:srgbClr val="222222"/>
+            </a:solidFill>
+          </a:ln>
+          <a:effectLst/>
+        </p:spPr>
+        <p:style>
+          <a:lnRef idx="2">
+            <a:schemeClr val="accent1"/>
+          </a:lnRef>
+          <a:fillRef idx="0">
+            <a:schemeClr val="accent1"/>
+          </a:fillRef>
+          <a:effectRef idx="1">
+            <a:schemeClr val="accent1"/>
+          </a:effectRef>
+          <a:fontRef idx="minor">
+            <a:schemeClr val="tx1"/>
+          </a:fontRef>
+        </p:style>
+      </p:cxnSp>
+      <p:sp>
+        <p:nvSpPr>
+          <p:cNvPr id="17" name="TextBox 16"/>
+          <p:cNvSpPr txBox="1"/>
+          <p:nvPr/>
+        </p:nvSpPr>
+        <p:spPr>
+          <a:xfrm>
+            <a:off x="8663940" y="6455664"/>
+            <a:ext cx="731520" cy="164592"/>
+          </a:xfrm>
+          <a:prstGeom prst="rect">
+            <a:avLst/>
+          </a:prstGeom>
+          <a:noFill/>
+          <a:effectLst/>
+        </p:spPr>
+        <p:txBody>
+          <a:bodyPr wrap="square" lIns="0" rIns="0" tIns="0" bIns="0" anchor="t">
+            <a:spAutoFit/>
+          </a:bodyPr>
+          <a:lstStyle/>
+          <a:p>
+            <a:pPr algn="ctr"/>
+            <a:r>
+              <a:rPr sz="800" b="0" i="0">
+                <a:solidFill>
+                  <a:srgbClr val="222222"/>
+                </a:solidFill>
+                <a:latin typeface="Arial"/>
+              </a:rPr>
+              <a:t>+0.5</a:t>
+            </a:r>
+          </a:p>
+        </p:txBody>
+      </p:sp>
+      <p:cxnSp>
+        <p:nvCxnSpPr>
+          <p:cNvPr id="18" name="Connector 17"/>
+          <p:cNvCxnSpPr/>
+          <p:nvPr/>
+        </p:nvCxnSpPr>
+        <p:spPr>
+          <a:xfrm>
+            <a:off x="10972800" y="6400800"/>
+            <a:ext cx="0" cy="64008"/>
+          </a:xfrm>
+          <a:prstGeom prst="line">
+            <a:avLst/>
+          </a:prstGeom>
+          <a:ln w="9525">
+            <a:solidFill>
+              <a:srgbClr val="222222"/>
+            </a:solidFill>
+          </a:ln>
+          <a:effectLst/>
+        </p:spPr>
+        <p:style>
+          <a:lnRef idx="2">
+            <a:schemeClr val="accent1"/>
+          </a:lnRef>
+          <a:fillRef idx="0">
+            <a:schemeClr val="accent1"/>
+          </a:fillRef>
+          <a:effectRef idx="1">
+            <a:schemeClr val="accent1"/>
+          </a:effectRef>
+          <a:fontRef idx="minor">
+            <a:schemeClr val="tx1"/>
+          </a:fontRef>
+        </p:style>
+      </p:cxnSp>
+      <p:sp>
+        <p:nvSpPr>
+          <p:cNvPr id="19" name="TextBox 18"/>
+          <p:cNvSpPr txBox="1"/>
+          <p:nvPr/>
+        </p:nvSpPr>
+        <p:spPr>
+          <a:xfrm>
+            <a:off x="10607040" y="6455664"/>
+            <a:ext cx="731520" cy="164592"/>
+          </a:xfrm>
+          <a:prstGeom prst="rect">
+            <a:avLst/>
+          </a:prstGeom>
+          <a:noFill/>
+          <a:effectLst/>
+        </p:spPr>
+        <p:txBody>
+          <a:bodyPr wrap="square" lIns="0" rIns="0" tIns="0" bIns="0" anchor="t">
+            <a:spAutoFit/>
+          </a:bodyPr>
+          <a:lstStyle/>
+          <a:p>
+            <a:pPr algn="ctr"/>
+            <a:r>
+              <a:rPr sz="800" b="0" i="0">
+                <a:solidFill>
+                  <a:srgbClr val="222222"/>
+                </a:solidFill>
+                <a:latin typeface="Arial"/>
+              </a:rPr>
+              <a:t>+1</a:t>
+            </a:r>
+          </a:p>
+        </p:txBody>
+      </p:sp>
+      <p:sp>
+        <p:nvSpPr>
+          <p:cNvPr id="20" name="TextBox 19"/>
+          <p:cNvSpPr txBox="1"/>
+          <p:nvPr/>
+        </p:nvSpPr>
+        <p:spPr>
+          <a:xfrm>
+            <a:off x="3200400" y="6748272"/>
+            <a:ext cx="7772400" cy="228600"/>
+          </a:xfrm>
+          <a:prstGeom prst="rect">
+            <a:avLst/>
+          </a:prstGeom>
+          <a:noFill/>
+          <a:effectLst/>
+        </p:spPr>
+        <p:txBody>
+          <a:bodyPr wrap="square" lIns="0" rIns="0" tIns="0" bIns="0" anchor="t">
+            <a:spAutoFit/>
+          </a:bodyPr>
+          <a:lstStyle/>
+          <a:p>
+            <a:pPr algn="ctr"/>
+            <a:r>
+              <a:rPr sz="900" b="1" i="0">
+                <a:solidFill>
+                  <a:srgbClr val="222222"/>
+                </a:solidFill>
+                <a:latin typeface="Arial"/>
+              </a:rPr>
+              <a:t>Spearman r  (n = 12 paired)</a:t>
+            </a:r>
+          </a:p>
+        </p:txBody>
+      </p:sp>
+      <p:cxnSp>
+        <p:nvCxnSpPr>
+          <p:cNvPr id="21" name="Connector 20"/>
+          <p:cNvCxnSpPr/>
+          <p:nvPr/>
+        </p:nvCxnSpPr>
+        <p:spPr>
+          <a:xfrm>
+            <a:off x="7086600" y="1097280"/>
+            <a:ext cx="0" cy="5303520"/>
+          </a:xfrm>
+          <a:prstGeom prst="line">
+            <a:avLst/>
+          </a:prstGeom>
+          <a:ln w="15240">
+            <a:solidFill>
+              <a:srgbClr val="222222"/>
+            </a:solidFill>
+          </a:ln>
+          <a:effectLst/>
+        </p:spPr>
+        <p:style>
+          <a:lnRef idx="2">
+            <a:schemeClr val="accent1"/>
+          </a:lnRef>
+          <a:fillRef idx="0">
+            <a:schemeClr val="accent1"/>
+          </a:fillRef>
+          <a:effectRef idx="1">
+            <a:schemeClr val="accent1"/>
+          </a:effectRef>
+          <a:fontRef idx="minor">
+            <a:schemeClr val="tx1"/>
+          </a:fontRef>
+        </p:style>
+      </p:cxnSp>
+      <p:cxnSp>
+        <p:nvCxnSpPr>
+          <p:cNvPr id="22" name="Connector 21"/>
+          <p:cNvCxnSpPr/>
+          <p:nvPr/>
+        </p:nvCxnSpPr>
+        <p:spPr>
+          <a:xfrm>
+            <a:off x="4832604" y="1097280"/>
+            <a:ext cx="0" cy="5303520"/>
+          </a:xfrm>
+          <a:prstGeom prst="line">
+            <a:avLst/>
+          </a:prstGeom>
+          <a:ln w="12700">
+            <a:solidFill>
+              <a:srgbClr val="D4A300"/>
+            </a:solidFill>
+            <a:prstDash val="dash"/>
+          </a:ln>
+          <a:effectLst/>
+        </p:spPr>
+        <p:style>
+          <a:lnRef idx="2">
+            <a:schemeClr val="accent1"/>
+          </a:lnRef>
+          <a:fillRef idx="0">
+            <a:schemeClr val="accent1"/>
+          </a:fillRef>
+          <a:effectRef idx="1">
+            <a:schemeClr val="accent1"/>
+          </a:effectRef>
+          <a:fontRef idx="minor">
+            <a:schemeClr val="tx1"/>
+          </a:fontRef>
+        </p:style>
+      </p:cxnSp>
+      <p:cxnSp>
+        <p:nvCxnSpPr>
+          <p:cNvPr id="23" name="Connector 22"/>
+          <p:cNvCxnSpPr/>
+          <p:nvPr/>
+        </p:nvCxnSpPr>
+        <p:spPr>
+          <a:xfrm>
+            <a:off x="9340596" y="1097280"/>
+            <a:ext cx="0" cy="5303520"/>
+          </a:xfrm>
+          <a:prstGeom prst="line">
+            <a:avLst/>
+          </a:prstGeom>
+          <a:ln w="12700">
+            <a:solidFill>
+              <a:srgbClr val="D4A300"/>
+            </a:solidFill>
+            <a:prstDash val="dash"/>
+          </a:ln>
+          <a:effectLst/>
+        </p:spPr>
+        <p:style>
+          <a:lnRef idx="2">
+            <a:schemeClr val="accent1"/>
+          </a:lnRef>
+          <a:fillRef idx="0">
+            <a:schemeClr val="accent1"/>
+          </a:fillRef>
+          <a:effectRef idx="1">
+            <a:schemeClr val="accent1"/>
+          </a:effectRef>
+          <a:fontRef idx="minor">
+            <a:schemeClr val="tx1"/>
+          </a:fontRef>
+        </p:style>
+      </p:cxnSp>
+      <p:sp>
+        <p:nvSpPr>
+          <p:cNvPr id="24" name="TextBox 23"/>
+          <p:cNvSpPr txBox="1"/>
+          <p:nvPr/>
+        </p:nvSpPr>
+        <p:spPr>
+          <a:xfrm>
+            <a:off x="182880" y="1104646"/>
+            <a:ext cx="2926080" cy="132588"/>
+          </a:xfrm>
+          <a:prstGeom prst="rect">
+            <a:avLst/>
+          </a:prstGeom>
+          <a:noFill/>
+          <a:effectLst/>
+        </p:spPr>
+        <p:txBody>
+          <a:bodyPr wrap="square" lIns="0" rIns="0" tIns="0" bIns="0" anchor="ctr">
+            <a:spAutoFit/>
+          </a:bodyPr>
+          <a:lstStyle/>
+          <a:p>
+            <a:pPr algn="r"/>
+            <a:r>
+              <a:rPr sz="600" b="0" i="0">
+                <a:solidFill>
+                  <a:srgbClr val="222222"/>
+                </a:solidFill>
+                <a:latin typeface="Arial"/>
+              </a:rPr>
+              <a:t>Myc Targets V × IGH_n_delta</a:t>
+            </a:r>
+          </a:p>
+        </p:txBody>
+      </p:sp>
+      <p:cxnSp>
+        <p:nvCxnSpPr>
+          <p:cNvPr id="25" name="Connector 24"/>
+          <p:cNvCxnSpPr/>
+          <p:nvPr/>
+        </p:nvCxnSpPr>
+        <p:spPr>
+          <a:xfrm>
+            <a:off x="7086600" y="1170940"/>
+            <a:ext cx="2172386" cy="0"/>
+          </a:xfrm>
+          <a:prstGeom prst="line">
+            <a:avLst/>
+          </a:prstGeom>
+          <a:ln w="10160">
+            <a:solidFill>
+              <a:srgbClr val="BBBBBB"/>
+            </a:solidFill>
+          </a:ln>
+          <a:effectLst/>
+        </p:spPr>
+        <p:style>
+          <a:lnRef idx="2">
+            <a:schemeClr val="accent1"/>
+          </a:lnRef>
+          <a:fillRef idx="0">
+            <a:schemeClr val="accent1"/>
+          </a:fillRef>
+          <a:effectRef idx="1">
+            <a:schemeClr val="accent1"/>
+          </a:effectRef>
+          <a:fontRef idx="minor">
+            <a:schemeClr val="tx1"/>
+          </a:fontRef>
+        </p:style>
+      </p:cxnSp>
+      <p:sp>
+        <p:nvSpPr>
+          <p:cNvPr id="26" name="Oval 25"/>
           <p:cNvSpPr/>
           <p:nvPr/>
         </p:nvSpPr>
@@ -3931,7 +4019,7 @@
       </p:sp>
       <p:sp>
         <p:nvSpPr>
-          <p:cNvPr id="25" name="TextBox 24"/>
+          <p:cNvPr id="27" name="TextBox 26"/>
           <p:cNvSpPr txBox="1"/>
           <p:nvPr/>
         </p:nvSpPr>
@@ -3967,7 +4055,7 @@
       </p:sp>
       <p:sp>
         <p:nvSpPr>
-          <p:cNvPr id="26" name="TextBox 25"/>
+          <p:cNvPr id="28" name="TextBox 27"/>
           <p:cNvSpPr txBox="1"/>
           <p:nvPr/>
         </p:nvSpPr>
@@ -4003,7 +4091,7 @@
       </p:sp>
       <p:cxnSp>
         <p:nvCxnSpPr>
-          <p:cNvPr id="27" name="Connector 26"/>
+          <p:cNvPr id="29" name="Connector 28"/>
           <p:cNvCxnSpPr/>
           <p:nvPr/>
         </p:nvCxnSpPr>
@@ -4039,7 +4127,7 @@
       </p:cxnSp>
       <p:sp>
         <p:nvSpPr>
-          <p:cNvPr id="28" name="Oval 27"/>
+          <p:cNvPr id="30" name="Oval 29"/>
           <p:cNvSpPr/>
           <p:nvPr/>
         </p:nvSpPr>
@@ -4085,7 +4173,7 @@
       </p:sp>
       <p:sp>
         <p:nvSpPr>
-          <p:cNvPr id="29" name="TextBox 28"/>
+          <p:cNvPr id="31" name="TextBox 30"/>
           <p:cNvSpPr txBox="1"/>
           <p:nvPr/>
         </p:nvSpPr>
@@ -4121,7 +4209,7 @@
       </p:sp>
       <p:sp>
         <p:nvSpPr>
-          <p:cNvPr id="30" name="TextBox 29"/>
+          <p:cNvPr id="32" name="TextBox 31"/>
           <p:cNvSpPr txBox="1"/>
           <p:nvPr/>
         </p:nvSpPr>
@@ -4157,7 +4245,7 @@
       </p:sp>
       <p:cxnSp>
         <p:nvCxnSpPr>
-          <p:cNvPr id="31" name="Connector 30"/>
+          <p:cNvPr id="33" name="Connector 32"/>
           <p:cNvCxnSpPr/>
           <p:nvPr/>
         </p:nvCxnSpPr>
@@ -4193,7 +4281,7 @@
       </p:cxnSp>
       <p:sp>
         <p:nvSpPr>
-          <p:cNvPr id="32" name="Oval 31"/>
+          <p:cNvPr id="34" name="Oval 33"/>
           <p:cNvSpPr/>
           <p:nvPr/>
         </p:nvSpPr>
@@ -4239,7 +4327,7 @@
       </p:sp>
       <p:sp>
         <p:nvSpPr>
-          <p:cNvPr id="33" name="TextBox 32"/>
+          <p:cNvPr id="35" name="TextBox 34"/>
           <p:cNvSpPr txBox="1"/>
           <p:nvPr/>
         </p:nvSpPr>
@@ -4275,7 +4363,7 @@
       </p:sp>
       <p:sp>
         <p:nvSpPr>
-          <p:cNvPr id="34" name="TextBox 33"/>
+          <p:cNvPr id="36" name="TextBox 35"/>
           <p:cNvSpPr txBox="1"/>
           <p:nvPr/>
         </p:nvSpPr>
@@ -4311,7 +4399,7 @@
       </p:sp>
       <p:cxnSp>
         <p:nvCxnSpPr>
-          <p:cNvPr id="35" name="Connector 34"/>
+          <p:cNvPr id="37" name="Connector 36"/>
           <p:cNvCxnSpPr/>
           <p:nvPr/>
         </p:nvCxnSpPr>
@@ -4347,7 +4435,7 @@
       </p:cxnSp>
       <p:sp>
         <p:nvSpPr>
-          <p:cNvPr id="36" name="Oval 35"/>
+          <p:cNvPr id="38" name="Oval 37"/>
           <p:cNvSpPr/>
           <p:nvPr/>
         </p:nvSpPr>
@@ -4393,7 +4481,7 @@
       </p:sp>
       <p:sp>
         <p:nvSpPr>
-          <p:cNvPr id="37" name="TextBox 36"/>
+          <p:cNvPr id="39" name="TextBox 38"/>
           <p:cNvSpPr txBox="1"/>
           <p:nvPr/>
         </p:nvSpPr>
@@ -4429,7 +4517,7 @@
       </p:sp>
       <p:sp>
         <p:nvSpPr>
-          <p:cNvPr id="38" name="TextBox 37"/>
+          <p:cNvPr id="40" name="TextBox 39"/>
           <p:cNvSpPr txBox="1"/>
           <p:nvPr/>
         </p:nvSpPr>
@@ -4465,7 +4553,7 @@
       </p:sp>
       <p:cxnSp>
         <p:nvCxnSpPr>
-          <p:cNvPr id="39" name="Connector 38"/>
+          <p:cNvPr id="41" name="Connector 40"/>
           <p:cNvCxnSpPr/>
           <p:nvPr/>
         </p:nvCxnSpPr>
@@ -4501,7 +4589,7 @@
       </p:cxnSp>
       <p:sp>
         <p:nvSpPr>
-          <p:cNvPr id="40" name="Oval 39"/>
+          <p:cNvPr id="42" name="Oval 41"/>
           <p:cNvSpPr/>
           <p:nvPr/>
         </p:nvSpPr>
@@ -4547,7 +4635,7 @@
       </p:sp>
       <p:sp>
         <p:nvSpPr>
-          <p:cNvPr id="41" name="TextBox 40"/>
+          <p:cNvPr id="43" name="TextBox 42"/>
           <p:cNvSpPr txBox="1"/>
           <p:nvPr/>
         </p:nvSpPr>
@@ -4583,7 +4671,7 @@
       </p:sp>
       <p:sp>
         <p:nvSpPr>
-          <p:cNvPr id="42" name="TextBox 41"/>
+          <p:cNvPr id="44" name="TextBox 43"/>
           <p:cNvSpPr txBox="1"/>
           <p:nvPr/>
         </p:nvSpPr>
@@ -4619,7 +4707,7 @@
       </p:sp>
       <p:cxnSp>
         <p:nvCxnSpPr>
-          <p:cNvPr id="43" name="Connector 42"/>
+          <p:cNvPr id="45" name="Connector 44"/>
           <p:cNvCxnSpPr/>
           <p:nvPr/>
         </p:nvCxnSpPr>
@@ -4655,7 +4743,7 @@
       </p:cxnSp>
       <p:sp>
         <p:nvSpPr>
-          <p:cNvPr id="44" name="Oval 43"/>
+          <p:cNvPr id="46" name="Oval 45"/>
           <p:cNvSpPr/>
           <p:nvPr/>
         </p:nvSpPr>
@@ -4701,7 +4789,7 @@
       </p:sp>
       <p:sp>
         <p:nvSpPr>
-          <p:cNvPr id="45" name="TextBox 44"/>
+          <p:cNvPr id="47" name="TextBox 46"/>
           <p:cNvSpPr txBox="1"/>
           <p:nvPr/>
         </p:nvSpPr>
@@ -4737,7 +4825,7 @@
       </p:sp>
       <p:sp>
         <p:nvSpPr>
-          <p:cNvPr id="46" name="TextBox 45"/>
+          <p:cNvPr id="48" name="TextBox 47"/>
           <p:cNvSpPr txBox="1"/>
           <p:nvPr/>
         </p:nvSpPr>
@@ -4773,7 +4861,7 @@
       </p:sp>
       <p:cxnSp>
         <p:nvCxnSpPr>
-          <p:cNvPr id="47" name="Connector 46"/>
+          <p:cNvPr id="49" name="Connector 48"/>
           <p:cNvCxnSpPr/>
           <p:nvPr/>
         </p:nvCxnSpPr>
@@ -4809,7 +4897,7 @@
       </p:cxnSp>
       <p:sp>
         <p:nvSpPr>
-          <p:cNvPr id="48" name="Oval 47"/>
+          <p:cNvPr id="50" name="Oval 49"/>
           <p:cNvSpPr/>
           <p:nvPr/>
         </p:nvSpPr>
@@ -4855,7 +4943,7 @@
       </p:sp>
       <p:sp>
         <p:nvSpPr>
-          <p:cNvPr id="49" name="TextBox 48"/>
+          <p:cNvPr id="51" name="TextBox 50"/>
           <p:cNvSpPr txBox="1"/>
           <p:nvPr/>
         </p:nvSpPr>
@@ -4891,7 +4979,7 @@
       </p:sp>
       <p:sp>
         <p:nvSpPr>
-          <p:cNvPr id="50" name="TextBox 49"/>
+          <p:cNvPr id="52" name="TextBox 51"/>
           <p:cNvSpPr txBox="1"/>
           <p:nvPr/>
         </p:nvSpPr>
@@ -4927,7 +5015,7 @@
       </p:sp>
       <p:cxnSp>
         <p:nvCxnSpPr>
-          <p:cNvPr id="51" name="Connector 50"/>
+          <p:cNvPr id="53" name="Connector 52"/>
           <p:cNvCxnSpPr/>
           <p:nvPr/>
         </p:nvCxnSpPr>
@@ -4963,7 +5051,7 @@
       </p:cxnSp>
       <p:sp>
         <p:nvSpPr>
-          <p:cNvPr id="52" name="Oval 51"/>
+          <p:cNvPr id="54" name="Oval 53"/>
           <p:cNvSpPr/>
           <p:nvPr/>
         </p:nvSpPr>
@@ -5009,7 +5097,7 @@
       </p:sp>
       <p:sp>
         <p:nvSpPr>
-          <p:cNvPr id="53" name="TextBox 52"/>
+          <p:cNvPr id="55" name="TextBox 54"/>
           <p:cNvSpPr txBox="1"/>
           <p:nvPr/>
         </p:nvSpPr>
@@ -5045,7 +5133,7 @@
       </p:sp>
       <p:sp>
         <p:nvSpPr>
-          <p:cNvPr id="54" name="TextBox 53"/>
+          <p:cNvPr id="56" name="TextBox 55"/>
           <p:cNvSpPr txBox="1"/>
           <p:nvPr/>
         </p:nvSpPr>
@@ -5081,7 +5169,7 @@
       </p:sp>
       <p:cxnSp>
         <p:nvCxnSpPr>
-          <p:cNvPr id="55" name="Connector 54"/>
+          <p:cNvPr id="57" name="Connector 56"/>
           <p:cNvCxnSpPr/>
           <p:nvPr/>
         </p:nvCxnSpPr>
@@ -5117,7 +5205,7 @@
       </p:cxnSp>
       <p:sp>
         <p:nvSpPr>
-          <p:cNvPr id="56" name="Oval 55"/>
+          <p:cNvPr id="58" name="Oval 57"/>
           <p:cNvSpPr/>
           <p:nvPr/>
         </p:nvSpPr>
@@ -5163,7 +5251,7 @@
       </p:sp>
       <p:sp>
         <p:nvSpPr>
-          <p:cNvPr id="57" name="TextBox 56"/>
+          <p:cNvPr id="59" name="TextBox 58"/>
           <p:cNvSpPr txBox="1"/>
           <p:nvPr/>
         </p:nvSpPr>
@@ -5199,7 +5287,7 @@
       </p:sp>
       <p:sp>
         <p:nvSpPr>
-          <p:cNvPr id="58" name="TextBox 57"/>
+          <p:cNvPr id="60" name="TextBox 59"/>
           <p:cNvSpPr txBox="1"/>
           <p:nvPr/>
         </p:nvSpPr>
@@ -5235,7 +5323,7 @@
       </p:sp>
       <p:cxnSp>
         <p:nvCxnSpPr>
-          <p:cNvPr id="59" name="Connector 58"/>
+          <p:cNvPr id="61" name="Connector 60"/>
           <p:cNvCxnSpPr/>
           <p:nvPr/>
         </p:nvCxnSpPr>
@@ -5271,7 +5359,7 @@
       </p:cxnSp>
       <p:sp>
         <p:nvSpPr>
-          <p:cNvPr id="60" name="Oval 59"/>
+          <p:cNvPr id="62" name="Oval 61"/>
           <p:cNvSpPr/>
           <p:nvPr/>
         </p:nvSpPr>
@@ -5317,7 +5405,7 @@
       </p:sp>
       <p:sp>
         <p:nvSpPr>
-          <p:cNvPr id="61" name="TextBox 60"/>
+          <p:cNvPr id="63" name="TextBox 62"/>
           <p:cNvSpPr txBox="1"/>
           <p:nvPr/>
         </p:nvSpPr>
@@ -5353,7 +5441,7 @@
       </p:sp>
       <p:sp>
         <p:nvSpPr>
-          <p:cNvPr id="62" name="TextBox 61"/>
+          <p:cNvPr id="64" name="TextBox 63"/>
           <p:cNvSpPr txBox="1"/>
           <p:nvPr/>
         </p:nvSpPr>
@@ -5389,7 +5477,7 @@
       </p:sp>
       <p:cxnSp>
         <p:nvCxnSpPr>
-          <p:cNvPr id="63" name="Connector 62"/>
+          <p:cNvPr id="65" name="Connector 64"/>
           <p:cNvCxnSpPr/>
           <p:nvPr/>
         </p:nvCxnSpPr>
@@ -5425,7 +5513,7 @@
       </p:cxnSp>
       <p:sp>
         <p:nvSpPr>
-          <p:cNvPr id="64" name="Oval 63"/>
+          <p:cNvPr id="66" name="Oval 65"/>
           <p:cNvSpPr/>
           <p:nvPr/>
         </p:nvSpPr>
@@ -5471,7 +5559,7 @@
       </p:sp>
       <p:sp>
         <p:nvSpPr>
-          <p:cNvPr id="65" name="TextBox 64"/>
+          <p:cNvPr id="67" name="TextBox 66"/>
           <p:cNvSpPr txBox="1"/>
           <p:nvPr/>
         </p:nvSpPr>
@@ -5507,7 +5595,7 @@
       </p:sp>
       <p:sp>
         <p:nvSpPr>
-          <p:cNvPr id="66" name="TextBox 65"/>
+          <p:cNvPr id="68" name="TextBox 67"/>
           <p:cNvSpPr txBox="1"/>
           <p:nvPr/>
         </p:nvSpPr>
@@ -5543,7 +5631,7 @@
       </p:sp>
       <p:cxnSp>
         <p:nvCxnSpPr>
-          <p:cNvPr id="67" name="Connector 66"/>
+          <p:cNvPr id="69" name="Connector 68"/>
           <p:cNvCxnSpPr/>
           <p:nvPr/>
         </p:nvCxnSpPr>
@@ -5579,7 +5667,7 @@
       </p:cxnSp>
       <p:sp>
         <p:nvSpPr>
-          <p:cNvPr id="68" name="Oval 67"/>
+          <p:cNvPr id="70" name="Oval 69"/>
           <p:cNvSpPr/>
           <p:nvPr/>
         </p:nvSpPr>
@@ -5625,7 +5713,7 @@
       </p:sp>
       <p:sp>
         <p:nvSpPr>
-          <p:cNvPr id="69" name="TextBox 68"/>
+          <p:cNvPr id="71" name="TextBox 70"/>
           <p:cNvSpPr txBox="1"/>
           <p:nvPr/>
         </p:nvSpPr>
@@ -5661,7 +5749,7 @@
       </p:sp>
       <p:sp>
         <p:nvSpPr>
-          <p:cNvPr id="70" name="TextBox 69"/>
+          <p:cNvPr id="72" name="TextBox 71"/>
           <p:cNvSpPr txBox="1"/>
           <p:nvPr/>
         </p:nvSpPr>
@@ -5697,7 +5785,7 @@
       </p:sp>
       <p:cxnSp>
         <p:nvCxnSpPr>
-          <p:cNvPr id="71" name="Connector 70"/>
+          <p:cNvPr id="73" name="Connector 72"/>
           <p:cNvCxnSpPr/>
           <p:nvPr/>
         </p:nvCxnSpPr>
@@ -5733,7 +5821,7 @@
       </p:cxnSp>
       <p:sp>
         <p:nvSpPr>
-          <p:cNvPr id="72" name="Oval 71"/>
+          <p:cNvPr id="74" name="Oval 73"/>
           <p:cNvSpPr/>
           <p:nvPr/>
         </p:nvSpPr>
@@ -5779,7 +5867,7 @@
       </p:sp>
       <p:sp>
         <p:nvSpPr>
-          <p:cNvPr id="73" name="TextBox 72"/>
+          <p:cNvPr id="75" name="TextBox 74"/>
           <p:cNvSpPr txBox="1"/>
           <p:nvPr/>
         </p:nvSpPr>
@@ -5815,7 +5903,7 @@
       </p:sp>
       <p:sp>
         <p:nvSpPr>
-          <p:cNvPr id="74" name="TextBox 73"/>
+          <p:cNvPr id="76" name="TextBox 75"/>
           <p:cNvSpPr txBox="1"/>
           <p:nvPr/>
         </p:nvSpPr>
@@ -5851,7 +5939,7 @@
       </p:sp>
       <p:cxnSp>
         <p:nvCxnSpPr>
-          <p:cNvPr id="75" name="Connector 74"/>
+          <p:cNvPr id="77" name="Connector 76"/>
           <p:cNvCxnSpPr/>
           <p:nvPr/>
         </p:nvCxnSpPr>
@@ -5887,7 +5975,7 @@
       </p:cxnSp>
       <p:sp>
         <p:nvSpPr>
-          <p:cNvPr id="76" name="Oval 75"/>
+          <p:cNvPr id="78" name="Oval 77"/>
           <p:cNvSpPr/>
           <p:nvPr/>
         </p:nvSpPr>
@@ -5933,7 +6021,7 @@
       </p:sp>
       <p:sp>
         <p:nvSpPr>
-          <p:cNvPr id="77" name="TextBox 76"/>
+          <p:cNvPr id="79" name="TextBox 78"/>
           <p:cNvSpPr txBox="1"/>
           <p:nvPr/>
         </p:nvSpPr>
@@ -5969,7 +6057,7 @@
       </p:sp>
       <p:sp>
         <p:nvSpPr>
-          <p:cNvPr id="78" name="TextBox 77"/>
+          <p:cNvPr id="80" name="TextBox 79"/>
           <p:cNvSpPr txBox="1"/>
           <p:nvPr/>
         </p:nvSpPr>
@@ -6005,7 +6093,7 @@
       </p:sp>
       <p:cxnSp>
         <p:nvCxnSpPr>
-          <p:cNvPr id="79" name="Connector 78"/>
+          <p:cNvPr id="81" name="Connector 80"/>
           <p:cNvCxnSpPr/>
           <p:nvPr/>
         </p:nvCxnSpPr>
@@ -6041,7 +6129,7 @@
       </p:cxnSp>
       <p:sp>
         <p:nvSpPr>
-          <p:cNvPr id="80" name="Oval 79"/>
+          <p:cNvPr id="82" name="Oval 81"/>
           <p:cNvSpPr/>
           <p:nvPr/>
         </p:nvSpPr>
@@ -6087,7 +6175,7 @@
       </p:sp>
       <p:sp>
         <p:nvSpPr>
-          <p:cNvPr id="81" name="TextBox 80"/>
+          <p:cNvPr id="83" name="TextBox 82"/>
           <p:cNvSpPr txBox="1"/>
           <p:nvPr/>
         </p:nvSpPr>
@@ -6123,7 +6211,7 @@
       </p:sp>
       <p:sp>
         <p:nvSpPr>
-          <p:cNvPr id="82" name="TextBox 81"/>
+          <p:cNvPr id="84" name="TextBox 83"/>
           <p:cNvSpPr txBox="1"/>
           <p:nvPr/>
         </p:nvSpPr>
@@ -6159,7 +6247,7 @@
       </p:sp>
       <p:cxnSp>
         <p:nvCxnSpPr>
-          <p:cNvPr id="83" name="Connector 82"/>
+          <p:cNvPr id="85" name="Connector 84"/>
           <p:cNvCxnSpPr/>
           <p:nvPr/>
         </p:nvCxnSpPr>
@@ -6195,7 +6283,7 @@
       </p:cxnSp>
       <p:sp>
         <p:nvSpPr>
-          <p:cNvPr id="84" name="Oval 83"/>
+          <p:cNvPr id="86" name="Oval 85"/>
           <p:cNvSpPr/>
           <p:nvPr/>
         </p:nvSpPr>
@@ -6241,7 +6329,7 @@
       </p:sp>
       <p:sp>
         <p:nvSpPr>
-          <p:cNvPr id="85" name="TextBox 84"/>
+          <p:cNvPr id="87" name="TextBox 86"/>
           <p:cNvSpPr txBox="1"/>
           <p:nvPr/>
         </p:nvSpPr>
@@ -6277,7 +6365,7 @@
       </p:sp>
       <p:sp>
         <p:nvSpPr>
-          <p:cNvPr id="86" name="TextBox 85"/>
+          <p:cNvPr id="88" name="TextBox 87"/>
           <p:cNvSpPr txBox="1"/>
           <p:nvPr/>
         </p:nvSpPr>
@@ -6313,7 +6401,7 @@
       </p:sp>
       <p:cxnSp>
         <p:nvCxnSpPr>
-          <p:cNvPr id="87" name="Connector 86"/>
+          <p:cNvPr id="89" name="Connector 88"/>
           <p:cNvCxnSpPr/>
           <p:nvPr/>
         </p:nvCxnSpPr>
@@ -6349,7 +6437,7 @@
       </p:cxnSp>
       <p:sp>
         <p:nvSpPr>
-          <p:cNvPr id="88" name="Oval 87"/>
+          <p:cNvPr id="90" name="Oval 89"/>
           <p:cNvSpPr/>
           <p:nvPr/>
         </p:nvSpPr>
@@ -6395,7 +6483,7 @@
       </p:sp>
       <p:sp>
         <p:nvSpPr>
-          <p:cNvPr id="89" name="TextBox 88"/>
+          <p:cNvPr id="91" name="TextBox 90"/>
           <p:cNvSpPr txBox="1"/>
           <p:nvPr/>
         </p:nvSpPr>
@@ -6431,7 +6519,7 @@
       </p:sp>
       <p:sp>
         <p:nvSpPr>
-          <p:cNvPr id="90" name="TextBox 89"/>
+          <p:cNvPr id="92" name="TextBox 91"/>
           <p:cNvSpPr txBox="1"/>
           <p:nvPr/>
         </p:nvSpPr>
@@ -6467,7 +6555,7 @@
       </p:sp>
       <p:cxnSp>
         <p:nvCxnSpPr>
-          <p:cNvPr id="91" name="Connector 90"/>
+          <p:cNvPr id="93" name="Connector 92"/>
           <p:cNvCxnSpPr/>
           <p:nvPr/>
         </p:nvCxnSpPr>
@@ -6503,7 +6591,7 @@
       </p:cxnSp>
       <p:sp>
         <p:nvSpPr>
-          <p:cNvPr id="92" name="Oval 91"/>
+          <p:cNvPr id="94" name="Oval 93"/>
           <p:cNvSpPr/>
           <p:nvPr/>
         </p:nvSpPr>
@@ -6549,7 +6637,7 @@
       </p:sp>
       <p:sp>
         <p:nvSpPr>
-          <p:cNvPr id="93" name="TextBox 92"/>
+          <p:cNvPr id="95" name="TextBox 94"/>
           <p:cNvSpPr txBox="1"/>
           <p:nvPr/>
         </p:nvSpPr>
@@ -6585,7 +6673,7 @@
       </p:sp>
       <p:sp>
         <p:nvSpPr>
-          <p:cNvPr id="94" name="TextBox 93"/>
+          <p:cNvPr id="96" name="TextBox 95"/>
           <p:cNvSpPr txBox="1"/>
           <p:nvPr/>
         </p:nvSpPr>
@@ -6621,7 +6709,7 @@
       </p:sp>
       <p:cxnSp>
         <p:nvCxnSpPr>
-          <p:cNvPr id="95" name="Connector 94"/>
+          <p:cNvPr id="97" name="Connector 96"/>
           <p:cNvCxnSpPr/>
           <p:nvPr/>
         </p:nvCxnSpPr>
@@ -6657,7 +6745,7 @@
       </p:cxnSp>
       <p:sp>
         <p:nvSpPr>
-          <p:cNvPr id="96" name="Oval 95"/>
+          <p:cNvPr id="98" name="Oval 97"/>
           <p:cNvSpPr/>
           <p:nvPr/>
         </p:nvSpPr>
@@ -6703,7 +6791,7 @@
       </p:sp>
       <p:sp>
         <p:nvSpPr>
-          <p:cNvPr id="97" name="TextBox 96"/>
+          <p:cNvPr id="99" name="TextBox 98"/>
           <p:cNvSpPr txBox="1"/>
           <p:nvPr/>
         </p:nvSpPr>
@@ -6739,7 +6827,7 @@
       </p:sp>
       <p:sp>
         <p:nvSpPr>
-          <p:cNvPr id="98" name="TextBox 97"/>
+          <p:cNvPr id="100" name="TextBox 99"/>
           <p:cNvSpPr txBox="1"/>
           <p:nvPr/>
         </p:nvSpPr>
@@ -6775,7 +6863,7 @@
       </p:sp>
       <p:cxnSp>
         <p:nvCxnSpPr>
-          <p:cNvPr id="99" name="Connector 98"/>
+          <p:cNvPr id="101" name="Connector 100"/>
           <p:cNvCxnSpPr/>
           <p:nvPr/>
         </p:nvCxnSpPr>
@@ -6811,7 +6899,7 @@
       </p:cxnSp>
       <p:sp>
         <p:nvSpPr>
-          <p:cNvPr id="100" name="Oval 99"/>
+          <p:cNvPr id="102" name="Oval 101"/>
           <p:cNvSpPr/>
           <p:nvPr/>
         </p:nvSpPr>
@@ -6857,7 +6945,7 @@
       </p:sp>
       <p:sp>
         <p:nvSpPr>
-          <p:cNvPr id="101" name="TextBox 100"/>
+          <p:cNvPr id="103" name="TextBox 102"/>
           <p:cNvSpPr txBox="1"/>
           <p:nvPr/>
         </p:nvSpPr>
@@ -6893,7 +6981,7 @@
       </p:sp>
       <p:sp>
         <p:nvSpPr>
-          <p:cNvPr id="102" name="TextBox 101"/>
+          <p:cNvPr id="104" name="TextBox 103"/>
           <p:cNvSpPr txBox="1"/>
           <p:nvPr/>
         </p:nvSpPr>
@@ -6929,7 +7017,7 @@
       </p:sp>
       <p:cxnSp>
         <p:nvCxnSpPr>
-          <p:cNvPr id="103" name="Connector 102"/>
+          <p:cNvPr id="105" name="Connector 104"/>
           <p:cNvCxnSpPr/>
           <p:nvPr/>
         </p:nvCxnSpPr>
@@ -6965,7 +7053,7 @@
       </p:cxnSp>
       <p:sp>
         <p:nvSpPr>
-          <p:cNvPr id="104" name="Oval 103"/>
+          <p:cNvPr id="106" name="Oval 105"/>
           <p:cNvSpPr/>
           <p:nvPr/>
         </p:nvSpPr>
@@ -7011,7 +7099,7 @@
       </p:sp>
       <p:sp>
         <p:nvSpPr>
-          <p:cNvPr id="105" name="TextBox 104"/>
+          <p:cNvPr id="107" name="TextBox 106"/>
           <p:cNvSpPr txBox="1"/>
           <p:nvPr/>
         </p:nvSpPr>
@@ -7047,7 +7135,7 @@
       </p:sp>
       <p:sp>
         <p:nvSpPr>
-          <p:cNvPr id="106" name="TextBox 105"/>
+          <p:cNvPr id="108" name="TextBox 107"/>
           <p:cNvSpPr txBox="1"/>
           <p:nvPr/>
         </p:nvSpPr>
@@ -7083,7 +7171,7 @@
       </p:sp>
       <p:cxnSp>
         <p:nvCxnSpPr>
-          <p:cNvPr id="107" name="Connector 106"/>
+          <p:cNvPr id="109" name="Connector 108"/>
           <p:cNvCxnSpPr/>
           <p:nvPr/>
         </p:nvCxnSpPr>
@@ -7119,7 +7207,7 @@
       </p:cxnSp>
       <p:sp>
         <p:nvSpPr>
-          <p:cNvPr id="108" name="Oval 107"/>
+          <p:cNvPr id="110" name="Oval 109"/>
           <p:cNvSpPr/>
           <p:nvPr/>
         </p:nvSpPr>
@@ -7165,7 +7253,7 @@
       </p:sp>
       <p:sp>
         <p:nvSpPr>
-          <p:cNvPr id="109" name="TextBox 108"/>
+          <p:cNvPr id="111" name="TextBox 110"/>
           <p:cNvSpPr txBox="1"/>
           <p:nvPr/>
         </p:nvSpPr>
@@ -7201,7 +7289,7 @@
       </p:sp>
       <p:sp>
         <p:nvSpPr>
-          <p:cNvPr id="110" name="TextBox 109"/>
+          <p:cNvPr id="112" name="TextBox 111"/>
           <p:cNvSpPr txBox="1"/>
           <p:nvPr/>
         </p:nvSpPr>
@@ -7237,7 +7325,7 @@
       </p:sp>
       <p:cxnSp>
         <p:nvCxnSpPr>
-          <p:cNvPr id="111" name="Connector 110"/>
+          <p:cNvPr id="113" name="Connector 112"/>
           <p:cNvCxnSpPr/>
           <p:nvPr/>
         </p:nvCxnSpPr>
@@ -7273,7 +7361,7 @@
       </p:cxnSp>
       <p:sp>
         <p:nvSpPr>
-          <p:cNvPr id="112" name="Oval 111"/>
+          <p:cNvPr id="114" name="Oval 113"/>
           <p:cNvSpPr/>
           <p:nvPr/>
         </p:nvSpPr>
@@ -7319,7 +7407,7 @@
       </p:sp>
       <p:sp>
         <p:nvSpPr>
-          <p:cNvPr id="113" name="TextBox 112"/>
+          <p:cNvPr id="115" name="TextBox 114"/>
           <p:cNvSpPr txBox="1"/>
           <p:nvPr/>
         </p:nvSpPr>
@@ -7355,7 +7443,7 @@
       </p:sp>
       <p:sp>
         <p:nvSpPr>
-          <p:cNvPr id="114" name="TextBox 113"/>
+          <p:cNvPr id="116" name="TextBox 115"/>
           <p:cNvSpPr txBox="1"/>
           <p:nvPr/>
         </p:nvSpPr>
@@ -7391,7 +7479,7 @@
       </p:sp>
       <p:cxnSp>
         <p:nvCxnSpPr>
-          <p:cNvPr id="115" name="Connector 114"/>
+          <p:cNvPr id="117" name="Connector 116"/>
           <p:cNvCxnSpPr/>
           <p:nvPr/>
         </p:nvCxnSpPr>
@@ -7427,7 +7515,7 @@
       </p:cxnSp>
       <p:sp>
         <p:nvSpPr>
-          <p:cNvPr id="116" name="Oval 115"/>
+          <p:cNvPr id="118" name="Oval 117"/>
           <p:cNvSpPr/>
           <p:nvPr/>
         </p:nvSpPr>
@@ -7473,7 +7561,7 @@
       </p:sp>
       <p:sp>
         <p:nvSpPr>
-          <p:cNvPr id="117" name="TextBox 116"/>
+          <p:cNvPr id="119" name="TextBox 118"/>
           <p:cNvSpPr txBox="1"/>
           <p:nvPr/>
         </p:nvSpPr>
@@ -7509,7 +7597,7 @@
       </p:sp>
       <p:sp>
         <p:nvSpPr>
-          <p:cNvPr id="118" name="TextBox 117"/>
+          <p:cNvPr id="120" name="TextBox 119"/>
           <p:cNvSpPr txBox="1"/>
           <p:nvPr/>
         </p:nvSpPr>
@@ -7545,7 +7633,7 @@
       </p:sp>
       <p:cxnSp>
         <p:nvCxnSpPr>
-          <p:cNvPr id="119" name="Connector 118"/>
+          <p:cNvPr id="121" name="Connector 120"/>
           <p:cNvCxnSpPr/>
           <p:nvPr/>
         </p:nvCxnSpPr>
@@ -7581,7 +7669,7 @@
       </p:cxnSp>
       <p:sp>
         <p:nvSpPr>
-          <p:cNvPr id="120" name="Oval 119"/>
+          <p:cNvPr id="122" name="Oval 121"/>
           <p:cNvSpPr/>
           <p:nvPr/>
         </p:nvSpPr>
@@ -7627,7 +7715,7 @@
       </p:sp>
       <p:sp>
         <p:nvSpPr>
-          <p:cNvPr id="121" name="TextBox 120"/>
+          <p:cNvPr id="123" name="TextBox 122"/>
           <p:cNvSpPr txBox="1"/>
           <p:nvPr/>
         </p:nvSpPr>
@@ -7663,7 +7751,7 @@
       </p:sp>
       <p:sp>
         <p:nvSpPr>
-          <p:cNvPr id="122" name="TextBox 121"/>
+          <p:cNvPr id="124" name="TextBox 123"/>
           <p:cNvSpPr txBox="1"/>
           <p:nvPr/>
         </p:nvSpPr>
@@ -7699,7 +7787,7 @@
       </p:sp>
       <p:cxnSp>
         <p:nvCxnSpPr>
-          <p:cNvPr id="123" name="Connector 122"/>
+          <p:cNvPr id="125" name="Connector 124"/>
           <p:cNvCxnSpPr/>
           <p:nvPr/>
         </p:nvCxnSpPr>
@@ -7735,7 +7823,7 @@
       </p:cxnSp>
       <p:sp>
         <p:nvSpPr>
-          <p:cNvPr id="124" name="Oval 123"/>
+          <p:cNvPr id="126" name="Oval 125"/>
           <p:cNvSpPr/>
           <p:nvPr/>
         </p:nvSpPr>
@@ -7781,7 +7869,7 @@
       </p:sp>
       <p:sp>
         <p:nvSpPr>
-          <p:cNvPr id="125" name="TextBox 124"/>
+          <p:cNvPr id="127" name="TextBox 126"/>
           <p:cNvSpPr txBox="1"/>
           <p:nvPr/>
         </p:nvSpPr>
@@ -7817,7 +7905,7 @@
       </p:sp>
       <p:sp>
         <p:nvSpPr>
-          <p:cNvPr id="126" name="TextBox 125"/>
+          <p:cNvPr id="128" name="TextBox 127"/>
           <p:cNvSpPr txBox="1"/>
           <p:nvPr/>
         </p:nvSpPr>
@@ -7853,7 +7941,7 @@
       </p:sp>
       <p:cxnSp>
         <p:nvCxnSpPr>
-          <p:cNvPr id="127" name="Connector 126"/>
+          <p:cNvPr id="129" name="Connector 128"/>
           <p:cNvCxnSpPr/>
           <p:nvPr/>
         </p:nvCxnSpPr>
@@ -7889,7 +7977,7 @@
       </p:cxnSp>
       <p:sp>
         <p:nvSpPr>
-          <p:cNvPr id="128" name="Oval 127"/>
+          <p:cNvPr id="130" name="Oval 129"/>
           <p:cNvSpPr/>
           <p:nvPr/>
         </p:nvSpPr>
@@ -7935,7 +8023,7 @@
       </p:sp>
       <p:sp>
         <p:nvSpPr>
-          <p:cNvPr id="129" name="TextBox 128"/>
+          <p:cNvPr id="131" name="TextBox 130"/>
           <p:cNvSpPr txBox="1"/>
           <p:nvPr/>
         </p:nvSpPr>
@@ -7971,7 +8059,7 @@
       </p:sp>
       <p:sp>
         <p:nvSpPr>
-          <p:cNvPr id="130" name="TextBox 129"/>
+          <p:cNvPr id="132" name="TextBox 131"/>
           <p:cNvSpPr txBox="1"/>
           <p:nvPr/>
         </p:nvSpPr>
@@ -8007,7 +8095,7 @@
       </p:sp>
       <p:cxnSp>
         <p:nvCxnSpPr>
-          <p:cNvPr id="131" name="Connector 130"/>
+          <p:cNvPr id="133" name="Connector 132"/>
           <p:cNvCxnSpPr/>
           <p:nvPr/>
         </p:nvCxnSpPr>
@@ -8043,7 +8131,7 @@
       </p:cxnSp>
       <p:sp>
         <p:nvSpPr>
-          <p:cNvPr id="132" name="Oval 131"/>
+          <p:cNvPr id="134" name="Oval 133"/>
           <p:cNvSpPr/>
           <p:nvPr/>
         </p:nvSpPr>
@@ -8089,7 +8177,7 @@
       </p:sp>
       <p:sp>
         <p:nvSpPr>
-          <p:cNvPr id="133" name="TextBox 132"/>
+          <p:cNvPr id="135" name="TextBox 134"/>
           <p:cNvSpPr txBox="1"/>
           <p:nvPr/>
         </p:nvSpPr>
@@ -8125,7 +8213,7 @@
       </p:sp>
       <p:sp>
         <p:nvSpPr>
-          <p:cNvPr id="134" name="TextBox 133"/>
+          <p:cNvPr id="136" name="TextBox 135"/>
           <p:cNvSpPr txBox="1"/>
           <p:nvPr/>
         </p:nvSpPr>
@@ -8161,7 +8249,7 @@
       </p:sp>
       <p:cxnSp>
         <p:nvCxnSpPr>
-          <p:cNvPr id="135" name="Connector 134"/>
+          <p:cNvPr id="137" name="Connector 136"/>
           <p:cNvCxnSpPr/>
           <p:nvPr/>
         </p:nvCxnSpPr>
@@ -8197,7 +8285,7 @@
       </p:cxnSp>
       <p:sp>
         <p:nvSpPr>
-          <p:cNvPr id="136" name="Oval 135"/>
+          <p:cNvPr id="138" name="Oval 137"/>
           <p:cNvSpPr/>
           <p:nvPr/>
         </p:nvSpPr>
@@ -8243,7 +8331,7 @@
       </p:sp>
       <p:sp>
         <p:nvSpPr>
-          <p:cNvPr id="137" name="TextBox 136"/>
+          <p:cNvPr id="139" name="TextBox 138"/>
           <p:cNvSpPr txBox="1"/>
           <p:nvPr/>
         </p:nvSpPr>
@@ -8279,7 +8367,7 @@
       </p:sp>
       <p:sp>
         <p:nvSpPr>
-          <p:cNvPr id="138" name="TextBox 137"/>
+          <p:cNvPr id="140" name="TextBox 139"/>
           <p:cNvSpPr txBox="1"/>
           <p:nvPr/>
         </p:nvSpPr>
@@ -8315,7 +8403,7 @@
       </p:sp>
       <p:cxnSp>
         <p:nvCxnSpPr>
-          <p:cNvPr id="139" name="Connector 138"/>
+          <p:cNvPr id="141" name="Connector 140"/>
           <p:cNvCxnSpPr/>
           <p:nvPr/>
         </p:nvCxnSpPr>
@@ -8351,7 +8439,7 @@
       </p:cxnSp>
       <p:sp>
         <p:nvSpPr>
-          <p:cNvPr id="140" name="Oval 139"/>
+          <p:cNvPr id="142" name="Oval 141"/>
           <p:cNvSpPr/>
           <p:nvPr/>
         </p:nvSpPr>
@@ -8397,7 +8485,7 @@
       </p:sp>
       <p:sp>
         <p:nvSpPr>
-          <p:cNvPr id="141" name="TextBox 140"/>
+          <p:cNvPr id="143" name="TextBox 142"/>
           <p:cNvSpPr txBox="1"/>
           <p:nvPr/>
         </p:nvSpPr>
@@ -8433,7 +8521,7 @@
       </p:sp>
       <p:sp>
         <p:nvSpPr>
-          <p:cNvPr id="142" name="TextBox 141"/>
+          <p:cNvPr id="144" name="TextBox 143"/>
           <p:cNvSpPr txBox="1"/>
           <p:nvPr/>
         </p:nvSpPr>
@@ -8469,7 +8557,7 @@
       </p:sp>
       <p:cxnSp>
         <p:nvCxnSpPr>
-          <p:cNvPr id="143" name="Connector 142"/>
+          <p:cNvPr id="145" name="Connector 144"/>
           <p:cNvCxnSpPr/>
           <p:nvPr/>
         </p:nvCxnSpPr>
@@ -8505,7 +8593,7 @@
       </p:cxnSp>
       <p:sp>
         <p:nvSpPr>
-          <p:cNvPr id="144" name="Oval 143"/>
+          <p:cNvPr id="146" name="Oval 145"/>
           <p:cNvSpPr/>
           <p:nvPr/>
         </p:nvSpPr>
@@ -8551,7 +8639,7 @@
       </p:sp>
       <p:sp>
         <p:nvSpPr>
-          <p:cNvPr id="145" name="TextBox 144"/>
+          <p:cNvPr id="147" name="TextBox 146"/>
           <p:cNvSpPr txBox="1"/>
           <p:nvPr/>
         </p:nvSpPr>
@@ -8587,7 +8675,7 @@
       </p:sp>
       <p:sp>
         <p:nvSpPr>
-          <p:cNvPr id="146" name="TextBox 145"/>
+          <p:cNvPr id="148" name="TextBox 147"/>
           <p:cNvSpPr txBox="1"/>
           <p:nvPr/>
         </p:nvSpPr>
@@ -8623,7 +8711,7 @@
       </p:sp>
       <p:cxnSp>
         <p:nvCxnSpPr>
-          <p:cNvPr id="147" name="Connector 146"/>
+          <p:cNvPr id="149" name="Connector 148"/>
           <p:cNvCxnSpPr/>
           <p:nvPr/>
         </p:nvCxnSpPr>
@@ -8659,7 +8747,7 @@
       </p:cxnSp>
       <p:sp>
         <p:nvSpPr>
-          <p:cNvPr id="148" name="Oval 147"/>
+          <p:cNvPr id="150" name="Oval 149"/>
           <p:cNvSpPr/>
           <p:nvPr/>
         </p:nvSpPr>
@@ -8705,7 +8793,7 @@
       </p:sp>
       <p:sp>
         <p:nvSpPr>
-          <p:cNvPr id="149" name="TextBox 148"/>
+          <p:cNvPr id="151" name="TextBox 150"/>
           <p:cNvSpPr txBox="1"/>
           <p:nvPr/>
         </p:nvSpPr>
@@ -8741,7 +8829,7 @@
       </p:sp>
       <p:sp>
         <p:nvSpPr>
-          <p:cNvPr id="150" name="TextBox 149"/>
+          <p:cNvPr id="152" name="TextBox 151"/>
           <p:cNvSpPr txBox="1"/>
           <p:nvPr/>
         </p:nvSpPr>
@@ -8777,7 +8865,7 @@
       </p:sp>
       <p:cxnSp>
         <p:nvCxnSpPr>
-          <p:cNvPr id="151" name="Connector 150"/>
+          <p:cNvPr id="153" name="Connector 152"/>
           <p:cNvCxnSpPr/>
           <p:nvPr/>
         </p:nvCxnSpPr>
@@ -8813,7 +8901,7 @@
       </p:cxnSp>
       <p:sp>
         <p:nvSpPr>
-          <p:cNvPr id="152" name="Oval 151"/>
+          <p:cNvPr id="154" name="Oval 153"/>
           <p:cNvSpPr/>
           <p:nvPr/>
         </p:nvSpPr>
@@ -8859,7 +8947,7 @@
       </p:sp>
       <p:sp>
         <p:nvSpPr>
-          <p:cNvPr id="153" name="TextBox 152"/>
+          <p:cNvPr id="155" name="TextBox 154"/>
           <p:cNvSpPr txBox="1"/>
           <p:nvPr/>
         </p:nvSpPr>
@@ -8895,7 +8983,7 @@
       </p:sp>
       <p:sp>
         <p:nvSpPr>
-          <p:cNvPr id="154" name="TextBox 153"/>
+          <p:cNvPr id="156" name="TextBox 155"/>
           <p:cNvSpPr txBox="1"/>
           <p:nvPr/>
         </p:nvSpPr>
@@ -8931,7 +9019,7 @@
       </p:sp>
       <p:cxnSp>
         <p:nvCxnSpPr>
-          <p:cNvPr id="155" name="Connector 154"/>
+          <p:cNvPr id="157" name="Connector 156"/>
           <p:cNvCxnSpPr/>
           <p:nvPr/>
         </p:nvCxnSpPr>
@@ -8967,7 +9055,7 @@
       </p:cxnSp>
       <p:sp>
         <p:nvSpPr>
-          <p:cNvPr id="156" name="Oval 155"/>
+          <p:cNvPr id="158" name="Oval 157"/>
           <p:cNvSpPr/>
           <p:nvPr/>
         </p:nvSpPr>
@@ -9013,7 +9101,7 @@
       </p:sp>
       <p:sp>
         <p:nvSpPr>
-          <p:cNvPr id="157" name="TextBox 156"/>
+          <p:cNvPr id="159" name="TextBox 158"/>
           <p:cNvSpPr txBox="1"/>
           <p:nvPr/>
         </p:nvSpPr>
@@ -9049,7 +9137,7 @@
       </p:sp>
       <p:sp>
         <p:nvSpPr>
-          <p:cNvPr id="158" name="TextBox 157"/>
+          <p:cNvPr id="160" name="TextBox 159"/>
           <p:cNvSpPr txBox="1"/>
           <p:nvPr/>
         </p:nvSpPr>
@@ -9085,7 +9173,7 @@
       </p:sp>
       <p:cxnSp>
         <p:nvCxnSpPr>
-          <p:cNvPr id="159" name="Connector 158"/>
+          <p:cNvPr id="161" name="Connector 160"/>
           <p:cNvCxnSpPr/>
           <p:nvPr/>
         </p:nvCxnSpPr>
@@ -9121,7 +9209,7 @@
       </p:cxnSp>
       <p:sp>
         <p:nvSpPr>
-          <p:cNvPr id="160" name="Oval 159"/>
+          <p:cNvPr id="162" name="Oval 161"/>
           <p:cNvSpPr/>
           <p:nvPr/>
         </p:nvSpPr>
@@ -9167,7 +9255,7 @@
       </p:sp>
       <p:sp>
         <p:nvSpPr>
-          <p:cNvPr id="161" name="TextBox 160"/>
+          <p:cNvPr id="163" name="TextBox 162"/>
           <p:cNvSpPr txBox="1"/>
           <p:nvPr/>
         </p:nvSpPr>
@@ -9203,7 +9291,7 @@
       </p:sp>
       <p:sp>
         <p:nvSpPr>
-          <p:cNvPr id="162" name="TextBox 161"/>
+          <p:cNvPr id="164" name="TextBox 163"/>
           <p:cNvSpPr txBox="1"/>
           <p:nvPr/>
         </p:nvSpPr>
@@ -9239,7 +9327,7 @@
       </p:sp>
       <p:cxnSp>
         <p:nvCxnSpPr>
-          <p:cNvPr id="163" name="Connector 162"/>
+          <p:cNvPr id="165" name="Connector 164"/>
           <p:cNvCxnSpPr/>
           <p:nvPr/>
         </p:nvCxnSpPr>
@@ -9275,7 +9363,7 @@
       </p:cxnSp>
       <p:sp>
         <p:nvSpPr>
-          <p:cNvPr id="164" name="Oval 163"/>
+          <p:cNvPr id="166" name="Oval 165"/>
           <p:cNvSpPr/>
           <p:nvPr/>
         </p:nvSpPr>
@@ -9321,7 +9409,7 @@
       </p:sp>
       <p:sp>
         <p:nvSpPr>
-          <p:cNvPr id="165" name="TextBox 164"/>
+          <p:cNvPr id="167" name="TextBox 166"/>
           <p:cNvSpPr txBox="1"/>
           <p:nvPr/>
         </p:nvSpPr>
@@ -9357,7 +9445,7 @@
       </p:sp>
       <p:sp>
         <p:nvSpPr>
-          <p:cNvPr id="166" name="Rectangle 165"/>
+          <p:cNvPr id="168" name="Rectangle 167"/>
           <p:cNvSpPr/>
           <p:nvPr/>
         </p:nvSpPr>
@@ -9372,7 +9460,7 @@
           <a:solidFill>
             <a:srgbClr val="D4A300"/>
           </a:solidFill>
-          <a:ln w="19050">
+          <a:ln w="10160">
             <a:solidFill>
               <a:srgbClr val="222222"/>
             </a:solidFill>
@@ -9403,14 +9491,14 @@
       </p:sp>
       <p:sp>
         <p:nvSpPr>
-          <p:cNvPr id="167" name="TextBox 166"/>
+          <p:cNvPr id="169" name="TextBox 168"/>
           <p:cNvSpPr txBox="1"/>
           <p:nvPr/>
         </p:nvSpPr>
         <p:spPr>
           <a:xfrm>
-            <a:off x="9601200" y="1417320"/>
-            <a:ext cx="2286000" cy="274320"/>
+            <a:off x="9601200" y="1280160"/>
+            <a:ext cx="2286000" cy="914400"/>
           </a:xfrm>
           <a:prstGeom prst="rect">
             <a:avLst/>
@@ -9426,27 +9514,29 @@
           <a:p>
             <a:pPr algn="ctr"/>
             <a:r>
-              <a:rPr sz="1400" b="1" i="0">
+              <a:rPr sz="1000" b="1" i="0">
                 <a:solidFill>
                   <a:srgbClr val="222222"/>
                 </a:solidFill>
                 <a:latin typeface="Arial"/>
               </a:rPr>
-              <a:t>0 / 36 pairs</a:t>
-            </a:r>
-          </a:p>
-        </p:txBody>
-      </p:sp>
-      <p:sp>
-        <p:nvSpPr>
-          <p:cNvPr id="168" name="TextBox 167"/>
+              <a:t>0 / 36 pairs
+P &lt; 0.05 (BH q ≥ 0.98)
+1.8 expected by chance</a:t>
+            </a:r>
+          </a:p>
+        </p:txBody>
+      </p:sp>
+      <p:sp>
+        <p:nvSpPr>
+          <p:cNvPr id="170" name="TextBox 169"/>
           <p:cNvSpPr txBox="1"/>
           <p:nvPr/>
         </p:nvSpPr>
         <p:spPr>
           <a:xfrm>
-            <a:off x="9601200" y="1691640"/>
-            <a:ext cx="2286000" cy="274320"/>
+            <a:off x="3200400" y="6446520"/>
+            <a:ext cx="7772400" cy="274320"/>
           </a:xfrm>
           <a:prstGeom prst="rect">
             <a:avLst/>
@@ -9460,51 +9550,15 @@
           </a:bodyPr>
           <a:lstStyle/>
           <a:p>
-            <a:pPr algn="ctr"/>
-            <a:r>
-              <a:rPr sz="1000" b="0" i="0">
+            <a:pPr algn="l"/>
+            <a:r>
+              <a:rPr sz="800" b="0" i="1">
                 <a:solidFill>
                   <a:srgbClr val="222222"/>
                 </a:solidFill>
                 <a:latin typeface="Arial"/>
               </a:rPr>
-              <a:t>P &lt; 0.05 (BH q ≥ 0.98)</a:t>
-            </a:r>
-          </a:p>
-        </p:txBody>
-      </p:sp>
-      <p:sp>
-        <p:nvSpPr>
-          <p:cNvPr id="169" name="TextBox 168"/>
-          <p:cNvSpPr txBox="1"/>
-          <p:nvPr/>
-        </p:nvSpPr>
-        <p:spPr>
-          <a:xfrm>
-            <a:off x="9601200" y="1965960"/>
-            <a:ext cx="2286000" cy="228600"/>
-          </a:xfrm>
-          <a:prstGeom prst="rect">
-            <a:avLst/>
-          </a:prstGeom>
-          <a:noFill/>
-          <a:effectLst/>
-        </p:spPr>
-        <p:txBody>
-          <a:bodyPr wrap="square" lIns="0" rIns="0" tIns="0" bIns="0" anchor="ctr">
-            <a:spAutoFit/>
-          </a:bodyPr>
-          <a:lstStyle/>
-          <a:p>
-            <a:pPr algn="ctr"/>
-            <a:r>
-              <a:rPr sz="800" b="0" i="1">
-                <a:solidFill>
-                  <a:srgbClr val="222222"/>
-                </a:solidFill>
-                <a:latin typeface="Arial"/>
-              </a:rPr>
-              <a:t>1.8 expected by chance</a:t>
+              <a:t>Gold dashed = |r| = 0.58 (P = 0.05 at n = 12). Shaded gray zones = |r| &gt; 0.58 (significant zone) — no hit lands inside.</a:t>
             </a:r>
           </a:p>
         </p:txBody>
@@ -9594,7 +9648,7 @@
                 </a:solidFill>
                 <a:latin typeface="Arial"/>
               </a:rPr>
-              <a:t>Purity-adjusted paired Δ sensitivity — 4 cascade features × response</a:t>
+              <a:t>Purity-adjusted paired Δ sensitivity — raw vs purity-adjusted Δ (Tarabichi 2021 purity-correction motif)</a:t>
             </a:r>
           </a:p>
         </p:txBody>
@@ -9608,7 +9662,7 @@
         <p:spPr>
           <a:xfrm>
             <a:off x="3200400" y="6217920"/>
-            <a:ext cx="7772400" cy="0"/>
+            <a:ext cx="5943600" cy="0"/>
           </a:xfrm>
           <a:prstGeom prst="line">
             <a:avLst/>
@@ -9679,7 +9733,7 @@
         </p:nvCxnSpPr>
         <p:spPr>
           <a:xfrm>
-            <a:off x="10972800" y="1188720"/>
+            <a:off x="9144000" y="1188720"/>
             <a:ext cx="0" cy="5029200"/>
           </a:xfrm>
           <a:prstGeom prst="line">
@@ -9716,7 +9770,7 @@
         <p:spPr>
           <a:xfrm>
             <a:off x="3200400" y="1188720"/>
-            <a:ext cx="7772400" cy="0"/>
+            <a:ext cx="5943600" cy="0"/>
           </a:xfrm>
           <a:prstGeom prst="line">
             <a:avLst/>
@@ -9882,7 +9936,7 @@
                 </a:solidFill>
                 <a:latin typeface="Arial"/>
               </a:rPr>
-              <a:t>1.0</a:t>
+              <a:t>1.1</a:t>
             </a:r>
           </a:p>
         </p:txBody>
@@ -9954,7 +10008,7 @@
                 </a:solidFill>
                 <a:latin typeface="Arial"/>
               </a:rPr>
-              <a:t>2.0</a:t>
+              <a:t>2.2</a:t>
             </a:r>
           </a:p>
         </p:txBody>
@@ -10026,7 +10080,7 @@
                 </a:solidFill>
                 <a:latin typeface="Arial"/>
               </a:rPr>
-              <a:t>3.0</a:t>
+              <a:t>3.3</a:t>
             </a:r>
           </a:p>
         </p:txBody>
@@ -10098,7 +10152,7 @@
                 </a:solidFill>
                 <a:latin typeface="Arial"/>
               </a:rPr>
-              <a:t>4.0</a:t>
+              <a:t>4.4</a:t>
             </a:r>
           </a:p>
         </p:txBody>
@@ -10183,7 +10237,7 @@
         </p:nvCxnSpPr>
         <p:spPr>
           <a:xfrm>
-            <a:off x="5143500" y="6217920"/>
+            <a:off x="4686300" y="6217920"/>
             <a:ext cx="0" cy="64008"/>
           </a:xfrm>
           <a:prstGeom prst="line">
@@ -10219,7 +10273,7 @@
         </p:nvSpPr>
         <p:spPr>
           <a:xfrm>
-            <a:off x="4777740" y="6272784"/>
+            <a:off x="4320540" y="6272784"/>
             <a:ext cx="731520" cy="164592"/>
           </a:xfrm>
           <a:prstGeom prst="rect">
@@ -10242,7 +10296,7 @@
                 </a:solidFill>
                 <a:latin typeface="Arial"/>
               </a:rPr>
-              <a:t>1.0</a:t>
+              <a:t>1.1</a:t>
             </a:r>
           </a:p>
         </p:txBody>
@@ -10255,7 +10309,7 @@
         </p:nvCxnSpPr>
         <p:spPr>
           <a:xfrm>
-            <a:off x="7086600" y="6217920"/>
+            <a:off x="6172200" y="6217920"/>
             <a:ext cx="0" cy="64008"/>
           </a:xfrm>
           <a:prstGeom prst="line">
@@ -10291,7 +10345,7 @@
         </p:nvSpPr>
         <p:spPr>
           <a:xfrm>
-            <a:off x="6720840" y="6272784"/>
+            <a:off x="5806440" y="6272784"/>
             <a:ext cx="731520" cy="164592"/>
           </a:xfrm>
           <a:prstGeom prst="rect">
@@ -10314,7 +10368,7 @@
                 </a:solidFill>
                 <a:latin typeface="Arial"/>
               </a:rPr>
-              <a:t>2.0</a:t>
+              <a:t>2.2</a:t>
             </a:r>
           </a:p>
         </p:txBody>
@@ -10327,7 +10381,7 @@
         </p:nvCxnSpPr>
         <p:spPr>
           <a:xfrm>
-            <a:off x="9029700" y="6217920"/>
+            <a:off x="7658100" y="6217920"/>
             <a:ext cx="0" cy="64008"/>
           </a:xfrm>
           <a:prstGeom prst="line">
@@ -10363,7 +10417,7 @@
         </p:nvSpPr>
         <p:spPr>
           <a:xfrm>
-            <a:off x="8663940" y="6272784"/>
+            <a:off x="7292340" y="6272784"/>
             <a:ext cx="731520" cy="164592"/>
           </a:xfrm>
           <a:prstGeom prst="rect">
@@ -10386,7 +10440,7 @@
                 </a:solidFill>
                 <a:latin typeface="Arial"/>
               </a:rPr>
-              <a:t>3.0</a:t>
+              <a:t>3.3</a:t>
             </a:r>
           </a:p>
         </p:txBody>
@@ -10399,7 +10453,7 @@
         </p:nvCxnSpPr>
         <p:spPr>
           <a:xfrm>
-            <a:off x="10972800" y="6217920"/>
+            <a:off x="9144000" y="6217920"/>
             <a:ext cx="0" cy="64008"/>
           </a:xfrm>
           <a:prstGeom prst="line">
@@ -10435,7 +10489,7 @@
         </p:nvSpPr>
         <p:spPr>
           <a:xfrm>
-            <a:off x="10607040" y="6272784"/>
+            <a:off x="8778240" y="6272784"/>
             <a:ext cx="731520" cy="164592"/>
           </a:xfrm>
           <a:prstGeom prst="rect">
@@ -10458,7 +10512,7 @@
                 </a:solidFill>
                 <a:latin typeface="Arial"/>
               </a:rPr>
-              <a:t>4.0</a:t>
+              <a:t>4.4</a:t>
             </a:r>
           </a:p>
         </p:txBody>
@@ -10472,7 +10526,7 @@
         <p:spPr>
           <a:xfrm>
             <a:off x="3200400" y="6565392"/>
-            <a:ext cx="7772400" cy="228600"/>
+            <a:ext cx="5943600" cy="228600"/>
           </a:xfrm>
           <a:prstGeom prst="rect">
             <a:avLst/>
@@ -10494,7 +10548,7 @@
                 </a:solidFill>
                 <a:latin typeface="Arial"/>
               </a:rPr>
-              <a:t>raw Δ</a:t>
+              <a:t>raw Δ (observed)</a:t>
             </a:r>
           </a:p>
         </p:txBody>
@@ -10544,14 +10598,14 @@
         <p:spPr>
           <a:xfrm flipV="1">
             <a:off x="3200400" y="1188720"/>
-            <a:ext cx="7772400" cy="5029200"/>
+            <a:ext cx="5943600" cy="5029200"/>
           </a:xfrm>
           <a:prstGeom prst="line">
             <a:avLst/>
           </a:prstGeom>
-          <a:ln w="6350">
+          <a:ln w="15240">
             <a:solidFill>
-              <a:srgbClr val="BBBBBB"/>
+              <a:srgbClr val="D4A300"/>
             </a:solidFill>
             <a:prstDash val="dash"/>
           </a:ln>
@@ -10580,8 +10634,8 @@
         </p:nvSpPr>
         <p:spPr>
           <a:xfrm>
-            <a:off x="10927080" y="5491078"/>
-            <a:ext cx="91440" cy="91440"/>
+            <a:off x="8547735" y="5544763"/>
+            <a:ext cx="109728" cy="109728"/>
           </a:xfrm>
           <a:prstGeom prst="ellipse">
             <a:avLst/>
@@ -10626,8 +10680,8 @@
         </p:nvSpPr>
         <p:spPr>
           <a:xfrm>
-            <a:off x="10927080" y="6002732"/>
-            <a:ext cx="91440" cy="91440"/>
+            <a:off x="8547735" y="6009903"/>
+            <a:ext cx="109728" cy="109728"/>
           </a:xfrm>
           <a:prstGeom prst="ellipse">
             <a:avLst/>
@@ -10672,8 +10726,8 @@
         </p:nvSpPr>
         <p:spPr>
           <a:xfrm>
-            <a:off x="10927080" y="5390324"/>
-            <a:ext cx="91440" cy="91440"/>
+            <a:off x="8547735" y="5453169"/>
+            <a:ext cx="109728" cy="109728"/>
           </a:xfrm>
           <a:prstGeom prst="ellipse">
             <a:avLst/>
@@ -10718,8 +10772,8 @@
         </p:nvSpPr>
         <p:spPr>
           <a:xfrm>
-            <a:off x="10927080" y="5390324"/>
-            <a:ext cx="91440" cy="91440"/>
+            <a:off x="8547735" y="5453169"/>
+            <a:ext cx="109728" cy="109728"/>
           </a:xfrm>
           <a:prstGeom prst="ellipse">
             <a:avLst/>
@@ -10764,8 +10818,8 @@
         </p:nvSpPr>
         <p:spPr>
           <a:xfrm>
-            <a:off x="10927080" y="6172200"/>
-            <a:ext cx="91440" cy="91440"/>
+            <a:off x="8547735" y="6163965"/>
+            <a:ext cx="109728" cy="109728"/>
           </a:xfrm>
           <a:prstGeom prst="ellipse">
             <a:avLst/>
@@ -10810,8 +10864,8 @@
         </p:nvSpPr>
         <p:spPr>
           <a:xfrm>
-            <a:off x="10927080" y="6142205"/>
-            <a:ext cx="91440" cy="91440"/>
+            <a:off x="8547735" y="6136697"/>
+            <a:ext cx="109728" cy="109728"/>
           </a:xfrm>
           <a:prstGeom prst="ellipse">
             <a:avLst/>
@@ -10856,8 +10910,8 @@
         </p:nvSpPr>
         <p:spPr>
           <a:xfrm>
-            <a:off x="10927080" y="6162202"/>
-            <a:ext cx="91440" cy="91440"/>
+            <a:off x="8547735" y="6154875"/>
+            <a:ext cx="109728" cy="109728"/>
           </a:xfrm>
           <a:prstGeom prst="ellipse">
             <a:avLst/>
@@ -10902,8 +10956,8 @@
         </p:nvSpPr>
         <p:spPr>
           <a:xfrm>
-            <a:off x="10927080" y="5902243"/>
-            <a:ext cx="91440" cy="91440"/>
+            <a:off x="8547735" y="5918549"/>
+            <a:ext cx="109728" cy="109728"/>
           </a:xfrm>
           <a:prstGeom prst="ellipse">
             <a:avLst/>
@@ -10948,8 +11002,8 @@
         </p:nvSpPr>
         <p:spPr>
           <a:xfrm>
-            <a:off x="10927080" y="5992229"/>
-            <a:ext cx="91440" cy="91440"/>
+            <a:off x="8547735" y="6000355"/>
+            <a:ext cx="109728" cy="109728"/>
           </a:xfrm>
           <a:prstGeom prst="ellipse">
             <a:avLst/>
@@ -10988,7 +11042,53 @@
       </p:sp>
       <p:sp>
         <p:nvSpPr>
-          <p:cNvPr id="40" name="TextBox 39"/>
+          <p:cNvPr id="40" name="Rectangle 39"/>
+          <p:cNvSpPr/>
+          <p:nvPr/>
+        </p:nvSpPr>
+        <p:spPr>
+          <a:xfrm>
+            <a:off x="3200400" y="6263640"/>
+            <a:ext cx="8229600" cy="320040"/>
+          </a:xfrm>
+          <a:prstGeom prst="rect">
+            <a:avLst/>
+          </a:prstGeom>
+          <a:solidFill>
+            <a:srgbClr val="F0F0F0"/>
+          </a:solidFill>
+          <a:ln w="10160">
+            <a:solidFill>
+              <a:srgbClr val="222222"/>
+            </a:solidFill>
+          </a:ln>
+          <a:effectLst/>
+        </p:spPr>
+        <p:style>
+          <a:lnRef idx="1">
+            <a:schemeClr val="accent1"/>
+          </a:lnRef>
+          <a:fillRef idx="3">
+            <a:schemeClr val="accent1"/>
+          </a:fillRef>
+          <a:effectRef idx="2">
+            <a:schemeClr val="accent1"/>
+          </a:effectRef>
+          <a:fontRef idx="minor">
+            <a:schemeClr val="lt1"/>
+          </a:fontRef>
+        </p:style>
+        <p:txBody>
+          <a:bodyPr rtlCol="0" anchor="ctr"/>
+          <a:lstStyle/>
+          <a:p>
+            <a:pPr algn="ctr"/>
+          </a:p>
+        </p:txBody>
+      </p:sp>
+      <p:sp>
+        <p:nvSpPr>
+          <p:cNvPr id="41" name="TextBox 40"/>
           <p:cNvSpPr txBox="1"/>
           <p:nvPr/>
         </p:nvSpPr>
@@ -11009,15 +11109,15 @@
           </a:bodyPr>
           <a:lstStyle/>
           <a:p>
-            <a:pPr algn="l"/>
-            <a:r>
-              <a:rPr sz="900" b="0" i="1">
+            <a:pPr algn="ctr"/>
+            <a:r>
+              <a:rPr sz="900" b="1" i="0">
                 <a:solidFill>
                   <a:srgbClr val="222222"/>
                 </a:solidFill>
                 <a:latin typeface="Arial"/>
               </a:rPr>
-              <a:t>Points scatter on the y = x diagonal — purity correction does not flip Δ sign or rank for any cascade feature. Cascade observations are not purity artefacts.</a:t>
+              <a:t>y = x diagonal (gold) — points scatter tightly: purity correction does not flip Δ sign or rank for any cascade feature</a:t>
             </a:r>
           </a:p>
         </p:txBody>
